--- a/SQL_DW_OLAP_Cube.pptx
+++ b/SQL_DW_OLAP_Cube.pptx
@@ -10,9 +10,9 @@
   <p:sldIdLst>
     <p:sldId id="334" r:id="rId2"/>
     <p:sldId id="333" r:id="rId3"/>
-    <p:sldId id="335" r:id="rId4"/>
-    <p:sldId id="337" r:id="rId5"/>
-    <p:sldId id="338" r:id="rId6"/>
+    <p:sldId id="338" r:id="rId4"/>
+    <p:sldId id="335" r:id="rId5"/>
+    <p:sldId id="337" r:id="rId6"/>
   </p:sldIdLst>
   <p:sldSz cx="12192000" cy="6858000"/>
   <p:notesSz cx="6858000" cy="9144000"/>
@@ -5174,923 +5174,6 @@
           <a:chExt cx="0" cy="0"/>
         </a:xfrm>
       </p:grpSpPr>
-      <p:sp>
-        <p:nvSpPr>
-          <p:cNvPr id="2" name="TextBox 1">
-            <a:extLst>
-              <a:ext uri="{FF2B5EF4-FFF2-40B4-BE49-F238E27FC236}">
-                <a16:creationId xmlns:a16="http://schemas.microsoft.com/office/drawing/2014/main" id="{1FF97A56-4D4A-3F47-9FFF-C6919AE57058}"/>
-              </a:ext>
-            </a:extLst>
-          </p:cNvPr>
-          <p:cNvSpPr txBox="1"/>
-          <p:nvPr/>
-        </p:nvSpPr>
-        <p:spPr>
-          <a:xfrm>
-            <a:off x="142504" y="118753"/>
-            <a:ext cx="3857995" cy="523220"/>
-          </a:xfrm>
-          <a:prstGeom prst="rect">
-            <a:avLst/>
-          </a:prstGeom>
-          <a:noFill/>
-        </p:spPr>
-        <p:txBody>
-          <a:bodyPr wrap="square" rtlCol="0">
-            <a:spAutoFit/>
-          </a:bodyPr>
-          <a:lstStyle/>
-          <a:p>
-            <a:r>
-              <a:rPr lang="en-US" sz="2800" b="1" dirty="0"/>
-              <a:t>Kimball DW Framework</a:t>
-            </a:r>
-          </a:p>
-        </p:txBody>
-      </p:sp>
-      <p:pic>
-        <p:nvPicPr>
-          <p:cNvPr id="1028" name="Picture 4" descr="Kimball Group | Dimensional Data Warehousing Experts">
-            <a:extLst>
-              <a:ext uri="{FF2B5EF4-FFF2-40B4-BE49-F238E27FC236}">
-                <a16:creationId xmlns:a16="http://schemas.microsoft.com/office/drawing/2014/main" id="{54BE1611-AB11-B843-B335-0B1AD870C097}"/>
-              </a:ext>
-            </a:extLst>
-          </p:cNvPr>
-          <p:cNvPicPr>
-            <a:picLocks noChangeAspect="1" noChangeArrowheads="1"/>
-          </p:cNvPicPr>
-          <p:nvPr/>
-        </p:nvPicPr>
-        <p:blipFill>
-          <a:blip r:embed="rId2" cstate="email">
-            <a:extLst>
-              <a:ext uri="{28A0092B-C50C-407E-A947-70E740481C1C}">
-                <a14:useLocalDpi xmlns:a14="http://schemas.microsoft.com/office/drawing/2010/main"/>
-              </a:ext>
-            </a:extLst>
-          </a:blip>
-          <a:srcRect/>
-          <a:stretch>
-            <a:fillRect/>
-          </a:stretch>
-        </p:blipFill>
-        <p:spPr bwMode="auto">
-          <a:xfrm>
-            <a:off x="2591645" y="781336"/>
-            <a:ext cx="1720112" cy="2013789"/>
-          </a:xfrm>
-          <a:prstGeom prst="rect">
-            <a:avLst/>
-          </a:prstGeom>
-          <a:noFill/>
-          <a:extLst>
-            <a:ext uri="{909E8E84-426E-40DD-AFC4-6F175D3DCCD1}">
-              <a14:hiddenFill xmlns:a14="http://schemas.microsoft.com/office/drawing/2010/main">
-                <a:solidFill>
-                  <a:srgbClr val="FFFFFF"/>
-                </a:solidFill>
-              </a14:hiddenFill>
-            </a:ext>
-          </a:extLst>
-        </p:spPr>
-      </p:pic>
-      <p:sp>
-        <p:nvSpPr>
-          <p:cNvPr id="3" name="TextBox 2">
-            <a:extLst>
-              <a:ext uri="{FF2B5EF4-FFF2-40B4-BE49-F238E27FC236}">
-                <a16:creationId xmlns:a16="http://schemas.microsoft.com/office/drawing/2014/main" id="{CB6AC39B-5121-BE4B-B106-D28C9291FF2B}"/>
-              </a:ext>
-            </a:extLst>
-          </p:cNvPr>
-          <p:cNvSpPr txBox="1"/>
-          <p:nvPr/>
-        </p:nvSpPr>
-        <p:spPr>
-          <a:xfrm>
-            <a:off x="1949557" y="2820188"/>
-            <a:ext cx="2901843" cy="584775"/>
-          </a:xfrm>
-          <a:prstGeom prst="rect">
-            <a:avLst/>
-          </a:prstGeom>
-          <a:noFill/>
-        </p:spPr>
-        <p:txBody>
-          <a:bodyPr wrap="square" rtlCol="0">
-            <a:spAutoFit/>
-          </a:bodyPr>
-          <a:lstStyle/>
-          <a:p>
-            <a:r>
-              <a:rPr lang="en-US" sz="1600" dirty="0"/>
-              <a:t>Kimball Group – closed in 2015</a:t>
-            </a:r>
-          </a:p>
-          <a:p>
-            <a:r>
-              <a:rPr lang="en-US" sz="1600" dirty="0">
-                <a:hlinkClick r:id="rId3"/>
-              </a:rPr>
-              <a:t>https://www.kimballgroup.com/</a:t>
-            </a:r>
-            <a:r>
-              <a:rPr lang="en-US" sz="1600" dirty="0"/>
-              <a:t> </a:t>
-            </a:r>
-          </a:p>
-        </p:txBody>
-      </p:sp>
-      <p:pic>
-        <p:nvPicPr>
-          <p:cNvPr id="1032" name="Picture 8">
-            <a:extLst>
-              <a:ext uri="{FF2B5EF4-FFF2-40B4-BE49-F238E27FC236}">
-                <a16:creationId xmlns:a16="http://schemas.microsoft.com/office/drawing/2014/main" id="{25FB8E3B-0DC1-B943-B985-7D05DDC29557}"/>
-              </a:ext>
-            </a:extLst>
-          </p:cNvPr>
-          <p:cNvPicPr>
-            <a:picLocks noChangeAspect="1" noChangeArrowheads="1"/>
-          </p:cNvPicPr>
-          <p:nvPr/>
-        </p:nvPicPr>
-        <p:blipFill>
-          <a:blip r:embed="rId4" cstate="email">
-            <a:extLst>
-              <a:ext uri="{28A0092B-C50C-407E-A947-70E740481C1C}">
-                <a14:useLocalDpi xmlns:a14="http://schemas.microsoft.com/office/drawing/2010/main"/>
-              </a:ext>
-            </a:extLst>
-          </a:blip>
-          <a:srcRect/>
-          <a:stretch>
-            <a:fillRect/>
-          </a:stretch>
-        </p:blipFill>
-        <p:spPr bwMode="auto">
-          <a:xfrm>
-            <a:off x="142504" y="4160462"/>
-            <a:ext cx="1807053" cy="2277069"/>
-          </a:xfrm>
-          <a:prstGeom prst="rect">
-            <a:avLst/>
-          </a:prstGeom>
-          <a:noFill/>
-          <a:extLst>
-            <a:ext uri="{909E8E84-426E-40DD-AFC4-6F175D3DCCD1}">
-              <a14:hiddenFill xmlns:a14="http://schemas.microsoft.com/office/drawing/2010/main">
-                <a:solidFill>
-                  <a:srgbClr val="FFFFFF"/>
-                </a:solidFill>
-              </a14:hiddenFill>
-            </a:ext>
-          </a:extLst>
-        </p:spPr>
-      </p:pic>
-      <p:pic>
-        <p:nvPicPr>
-          <p:cNvPr id="1034" name="Picture 10" descr="Kimball's Data Warehouse Toolkit Classics, 3 Volume Set">
-            <a:extLst>
-              <a:ext uri="{FF2B5EF4-FFF2-40B4-BE49-F238E27FC236}">
-                <a16:creationId xmlns:a16="http://schemas.microsoft.com/office/drawing/2014/main" id="{E667604D-59E9-1345-9E47-35276E3959DF}"/>
-              </a:ext>
-            </a:extLst>
-          </p:cNvPr>
-          <p:cNvPicPr>
-            <a:picLocks noChangeAspect="1" noChangeArrowheads="1"/>
-          </p:cNvPicPr>
-          <p:nvPr/>
-        </p:nvPicPr>
-        <p:blipFill rotWithShape="1">
-          <a:blip r:embed="rId5" cstate="email">
-            <a:extLst>
-              <a:ext uri="{28A0092B-C50C-407E-A947-70E740481C1C}">
-                <a14:useLocalDpi xmlns:a14="http://schemas.microsoft.com/office/drawing/2010/main"/>
-              </a:ext>
-            </a:extLst>
-          </a:blip>
-          <a:srcRect/>
-          <a:stretch/>
-        </p:blipFill>
-        <p:spPr bwMode="auto">
-          <a:xfrm>
-            <a:off x="2793999" y="4160461"/>
-            <a:ext cx="1842059" cy="2277069"/>
-          </a:xfrm>
-          <a:prstGeom prst="rect">
-            <a:avLst/>
-          </a:prstGeom>
-          <a:noFill/>
-          <a:extLst>
-            <a:ext uri="{909E8E84-426E-40DD-AFC4-6F175D3DCCD1}">
-              <a14:hiddenFill xmlns:a14="http://schemas.microsoft.com/office/drawing/2010/main">
-                <a:solidFill>
-                  <a:srgbClr val="FFFFFF"/>
-                </a:solidFill>
-              </a14:hiddenFill>
-            </a:ext>
-          </a:extLst>
-        </p:spPr>
-      </p:pic>
-      <p:sp>
-        <p:nvSpPr>
-          <p:cNvPr id="9" name="TextBox 8">
-            <a:extLst>
-              <a:ext uri="{FF2B5EF4-FFF2-40B4-BE49-F238E27FC236}">
-                <a16:creationId xmlns:a16="http://schemas.microsoft.com/office/drawing/2014/main" id="{5FE68235-DA87-9642-AF27-C4835BC23BB7}"/>
-              </a:ext>
-            </a:extLst>
-          </p:cNvPr>
-          <p:cNvSpPr txBox="1"/>
-          <p:nvPr/>
-        </p:nvSpPr>
-        <p:spPr>
-          <a:xfrm>
-            <a:off x="8191503" y="118753"/>
-            <a:ext cx="3857995" cy="523220"/>
-          </a:xfrm>
-          <a:prstGeom prst="rect">
-            <a:avLst/>
-          </a:prstGeom>
-          <a:noFill/>
-        </p:spPr>
-        <p:txBody>
-          <a:bodyPr wrap="square" rtlCol="0">
-            <a:spAutoFit/>
-          </a:bodyPr>
-          <a:lstStyle/>
-          <a:p>
-            <a:r>
-              <a:rPr lang="en-US" sz="2800" b="1" dirty="0" err="1"/>
-              <a:t>Inmon</a:t>
-            </a:r>
-            <a:r>
-              <a:rPr lang="en-US" sz="2800" b="1" dirty="0"/>
-              <a:t> DW Framework</a:t>
-            </a:r>
-          </a:p>
-        </p:txBody>
-      </p:sp>
-      <p:pic>
-        <p:nvPicPr>
-          <p:cNvPr id="10" name="Picture 6">
-            <a:extLst>
-              <a:ext uri="{FF2B5EF4-FFF2-40B4-BE49-F238E27FC236}">
-                <a16:creationId xmlns:a16="http://schemas.microsoft.com/office/drawing/2014/main" id="{12840A34-CCB8-574E-9DBC-EFB4880CEADB}"/>
-              </a:ext>
-            </a:extLst>
-          </p:cNvPr>
-          <p:cNvPicPr>
-            <a:picLocks noChangeAspect="1" noChangeArrowheads="1"/>
-          </p:cNvPicPr>
-          <p:nvPr/>
-        </p:nvPicPr>
-        <p:blipFill>
-          <a:blip r:embed="rId6" cstate="email">
-            <a:extLst>
-              <a:ext uri="{28A0092B-C50C-407E-A947-70E740481C1C}">
-                <a14:useLocalDpi xmlns:a14="http://schemas.microsoft.com/office/drawing/2010/main"/>
-              </a:ext>
-            </a:extLst>
-          </a:blip>
-          <a:srcRect/>
-          <a:stretch>
-            <a:fillRect/>
-          </a:stretch>
-        </p:blipFill>
-        <p:spPr bwMode="auto">
-          <a:xfrm>
-            <a:off x="9207500" y="852270"/>
-            <a:ext cx="1249610" cy="1816100"/>
-          </a:xfrm>
-          <a:prstGeom prst="rect">
-            <a:avLst/>
-          </a:prstGeom>
-          <a:noFill/>
-          <a:extLst>
-            <a:ext uri="{909E8E84-426E-40DD-AFC4-6F175D3DCCD1}">
-              <a14:hiddenFill xmlns:a14="http://schemas.microsoft.com/office/drawing/2010/main">
-                <a:solidFill>
-                  <a:srgbClr val="FFFFFF"/>
-                </a:solidFill>
-              </a14:hiddenFill>
-            </a:ext>
-          </a:extLst>
-        </p:spPr>
-      </p:pic>
-      <p:sp>
-        <p:nvSpPr>
-          <p:cNvPr id="11" name="TextBox 10">
-            <a:extLst>
-              <a:ext uri="{FF2B5EF4-FFF2-40B4-BE49-F238E27FC236}">
-                <a16:creationId xmlns:a16="http://schemas.microsoft.com/office/drawing/2014/main" id="{EE04A850-E9C3-DB4B-8CFD-9FC3A00FB0FB}"/>
-              </a:ext>
-            </a:extLst>
-          </p:cNvPr>
-          <p:cNvSpPr txBox="1"/>
-          <p:nvPr/>
-        </p:nvSpPr>
-        <p:spPr>
-          <a:xfrm>
-            <a:off x="8890000" y="2687467"/>
-            <a:ext cx="1905000" cy="584775"/>
-          </a:xfrm>
-          <a:prstGeom prst="rect">
-            <a:avLst/>
-          </a:prstGeom>
-          <a:noFill/>
-        </p:spPr>
-        <p:txBody>
-          <a:bodyPr wrap="square" rtlCol="0">
-            <a:spAutoFit/>
-          </a:bodyPr>
-          <a:lstStyle/>
-          <a:p>
-            <a:pPr algn="ctr"/>
-            <a:r>
-              <a:rPr lang="en-US" sz="1600" dirty="0"/>
-              <a:t>William H. </a:t>
-            </a:r>
-            <a:r>
-              <a:rPr lang="en-US" sz="1600" dirty="0" err="1"/>
-              <a:t>Inmon</a:t>
-            </a:r>
-            <a:endParaRPr lang="en-US" sz="1600" dirty="0"/>
-          </a:p>
-          <a:p>
-            <a:pPr algn="ctr"/>
-            <a:r>
-              <a:rPr lang="en-US" sz="1600" dirty="0"/>
-              <a:t>(1945 – present)</a:t>
-            </a:r>
-          </a:p>
-        </p:txBody>
-      </p:sp>
-      <p:pic>
-        <p:nvPicPr>
-          <p:cNvPr id="12" name="Picture 2">
-            <a:extLst>
-              <a:ext uri="{FF2B5EF4-FFF2-40B4-BE49-F238E27FC236}">
-                <a16:creationId xmlns:a16="http://schemas.microsoft.com/office/drawing/2014/main" id="{415DA38A-988E-0D40-BBF8-D685231221F0}"/>
-              </a:ext>
-            </a:extLst>
-          </p:cNvPr>
-          <p:cNvPicPr>
-            <a:picLocks noChangeAspect="1" noChangeArrowheads="1"/>
-          </p:cNvPicPr>
-          <p:nvPr/>
-        </p:nvPicPr>
-        <p:blipFill>
-          <a:blip r:embed="rId7" cstate="email">
-            <a:extLst>
-              <a:ext uri="{28A0092B-C50C-407E-A947-70E740481C1C}">
-                <a14:useLocalDpi xmlns:a14="http://schemas.microsoft.com/office/drawing/2010/main"/>
-              </a:ext>
-            </a:extLst>
-          </a:blip>
-          <a:srcRect/>
-          <a:stretch>
-            <a:fillRect/>
-          </a:stretch>
-        </p:blipFill>
-        <p:spPr bwMode="auto">
-          <a:xfrm>
-            <a:off x="7964060" y="4160461"/>
-            <a:ext cx="1848980" cy="2277069"/>
-          </a:xfrm>
-          <a:prstGeom prst="rect">
-            <a:avLst/>
-          </a:prstGeom>
-          <a:noFill/>
-          <a:extLst>
-            <a:ext uri="{909E8E84-426E-40DD-AFC4-6F175D3DCCD1}">
-              <a14:hiddenFill xmlns:a14="http://schemas.microsoft.com/office/drawing/2010/main">
-                <a:solidFill>
-                  <a:srgbClr val="FFFFFF"/>
-                </a:solidFill>
-              </a14:hiddenFill>
-            </a:ext>
-          </a:extLst>
-        </p:spPr>
-      </p:pic>
-      <p:pic>
-        <p:nvPicPr>
-          <p:cNvPr id="13" name="Picture 4">
-            <a:extLst>
-              <a:ext uri="{FF2B5EF4-FFF2-40B4-BE49-F238E27FC236}">
-                <a16:creationId xmlns:a16="http://schemas.microsoft.com/office/drawing/2014/main" id="{DA81332F-2F81-5B45-954D-22A2A17F45E3}"/>
-              </a:ext>
-            </a:extLst>
-          </p:cNvPr>
-          <p:cNvPicPr>
-            <a:picLocks noChangeAspect="1" noChangeArrowheads="1"/>
-          </p:cNvPicPr>
-          <p:nvPr/>
-        </p:nvPicPr>
-        <p:blipFill>
-          <a:blip r:embed="rId8" cstate="email">
-            <a:extLst>
-              <a:ext uri="{28A0092B-C50C-407E-A947-70E740481C1C}">
-                <a14:useLocalDpi xmlns:a14="http://schemas.microsoft.com/office/drawing/2010/main"/>
-              </a:ext>
-            </a:extLst>
-          </a:blip>
-          <a:srcRect/>
-          <a:stretch>
-            <a:fillRect/>
-          </a:stretch>
-        </p:blipFill>
-        <p:spPr bwMode="auto">
-          <a:xfrm>
-            <a:off x="10169432" y="4160461"/>
-            <a:ext cx="1743167" cy="2277069"/>
-          </a:xfrm>
-          <a:prstGeom prst="rect">
-            <a:avLst/>
-          </a:prstGeom>
-          <a:noFill/>
-          <a:extLst>
-            <a:ext uri="{909E8E84-426E-40DD-AFC4-6F175D3DCCD1}">
-              <a14:hiddenFill xmlns:a14="http://schemas.microsoft.com/office/drawing/2010/main">
-                <a:solidFill>
-                  <a:srgbClr val="FFFFFF"/>
-                </a:solidFill>
-              </a14:hiddenFill>
-            </a:ext>
-          </a:extLst>
-        </p:spPr>
-      </p:pic>
-      <p:pic>
-        <p:nvPicPr>
-          <p:cNvPr id="1036" name="Picture 12" descr="Ralph Kimball data warehouse architecture">
-            <a:extLst>
-              <a:ext uri="{FF2B5EF4-FFF2-40B4-BE49-F238E27FC236}">
-                <a16:creationId xmlns:a16="http://schemas.microsoft.com/office/drawing/2014/main" id="{4B49ABE2-7BEF-644F-91D4-C8C012C6F9F9}"/>
-              </a:ext>
-            </a:extLst>
-          </p:cNvPr>
-          <p:cNvPicPr>
-            <a:picLocks noChangeAspect="1" noChangeArrowheads="1"/>
-          </p:cNvPicPr>
-          <p:nvPr/>
-        </p:nvPicPr>
-        <p:blipFill>
-          <a:blip r:embed="rId9">
-            <a:extLst>
-              <a:ext uri="{28A0092B-C50C-407E-A947-70E740481C1C}">
-                <a14:useLocalDpi xmlns:a14="http://schemas.microsoft.com/office/drawing/2010/main"/>
-              </a:ext>
-            </a:extLst>
-          </a:blip>
-          <a:srcRect/>
-          <a:stretch>
-            <a:fillRect/>
-          </a:stretch>
-        </p:blipFill>
-        <p:spPr bwMode="auto">
-          <a:xfrm>
-            <a:off x="142504" y="781336"/>
-            <a:ext cx="1592386" cy="2070102"/>
-          </a:xfrm>
-          <a:prstGeom prst="rect">
-            <a:avLst/>
-          </a:prstGeom>
-          <a:noFill/>
-          <a:extLst>
-            <a:ext uri="{909E8E84-426E-40DD-AFC4-6F175D3DCCD1}">
-              <a14:hiddenFill xmlns:a14="http://schemas.microsoft.com/office/drawing/2010/main">
-                <a:solidFill>
-                  <a:srgbClr val="FFFFFF"/>
-                </a:solidFill>
-              </a14:hiddenFill>
-            </a:ext>
-          </a:extLst>
-        </p:spPr>
-      </p:pic>
-      <p:sp>
-        <p:nvSpPr>
-          <p:cNvPr id="15" name="TextBox 14">
-            <a:extLst>
-              <a:ext uri="{FF2B5EF4-FFF2-40B4-BE49-F238E27FC236}">
-                <a16:creationId xmlns:a16="http://schemas.microsoft.com/office/drawing/2014/main" id="{EC47885C-34DB-5E4D-BE91-505AFE558C65}"/>
-              </a:ext>
-            </a:extLst>
-          </p:cNvPr>
-          <p:cNvSpPr txBox="1"/>
-          <p:nvPr/>
-        </p:nvSpPr>
-        <p:spPr>
-          <a:xfrm>
-            <a:off x="34040" y="2851438"/>
-            <a:ext cx="1807053" cy="584775"/>
-          </a:xfrm>
-          <a:prstGeom prst="rect">
-            <a:avLst/>
-          </a:prstGeom>
-          <a:noFill/>
-        </p:spPr>
-        <p:txBody>
-          <a:bodyPr wrap="square" rtlCol="0">
-            <a:spAutoFit/>
-          </a:bodyPr>
-          <a:lstStyle/>
-          <a:p>
-            <a:pPr algn="ctr"/>
-            <a:r>
-              <a:rPr lang="en-US" sz="1600" dirty="0"/>
-              <a:t>Ralph Kimball</a:t>
-            </a:r>
-          </a:p>
-          <a:p>
-            <a:pPr algn="ctr"/>
-            <a:r>
-              <a:rPr lang="en-US" sz="1600" dirty="0"/>
-              <a:t>(1944 – present)</a:t>
-            </a:r>
-          </a:p>
-        </p:txBody>
-      </p:sp>
-    </p:spTree>
-    <p:extLst>
-      <p:ext uri="{BB962C8B-B14F-4D97-AF65-F5344CB8AC3E}">
-        <p14:creationId xmlns:p14="http://schemas.microsoft.com/office/powerpoint/2010/main" val="4190198152"/>
-      </p:ext>
-    </p:extLst>
-  </p:cSld>
-  <p:clrMapOvr>
-    <a:masterClrMapping/>
-  </p:clrMapOvr>
-</p:sld>
-</file>
-
-<file path=ppt/slides/slide4.xml><?xml version="1.0" encoding="utf-8"?>
-<p:sld xmlns:a="http://schemas.openxmlformats.org/drawingml/2006/main" xmlns:r="http://schemas.openxmlformats.org/officeDocument/2006/relationships" xmlns:p="http://schemas.openxmlformats.org/presentationml/2006/main">
-  <p:cSld>
-    <p:spTree>
-      <p:nvGrpSpPr>
-        <p:cNvPr id="1" name=""/>
-        <p:cNvGrpSpPr/>
-        <p:nvPr/>
-      </p:nvGrpSpPr>
-      <p:grpSpPr>
-        <a:xfrm>
-          <a:off x="0" y="0"/>
-          <a:ext cx="0" cy="0"/>
-          <a:chOff x="0" y="0"/>
-          <a:chExt cx="0" cy="0"/>
-        </a:xfrm>
-      </p:grpSpPr>
-      <p:pic>
-        <p:nvPicPr>
-          <p:cNvPr id="2" name="Picture 1">
-            <a:extLst>
-              <a:ext uri="{FF2B5EF4-FFF2-40B4-BE49-F238E27FC236}">
-                <a16:creationId xmlns:a16="http://schemas.microsoft.com/office/drawing/2014/main" id="{F4626B5A-FFA5-2E46-962E-FE8D97840C15}"/>
-              </a:ext>
-            </a:extLst>
-          </p:cNvPr>
-          <p:cNvPicPr>
-            <a:picLocks noChangeAspect="1"/>
-          </p:cNvPicPr>
-          <p:nvPr/>
-        </p:nvPicPr>
-        <p:blipFill>
-          <a:blip r:embed="rId2" cstate="email">
-            <a:extLst>
-              <a:ext uri="{28A0092B-C50C-407E-A947-70E740481C1C}">
-                <a14:useLocalDpi xmlns:a14="http://schemas.microsoft.com/office/drawing/2010/main"/>
-              </a:ext>
-            </a:extLst>
-          </a:blip>
-          <a:stretch>
-            <a:fillRect/>
-          </a:stretch>
-        </p:blipFill>
-        <p:spPr>
-          <a:xfrm>
-            <a:off x="6096000" y="469900"/>
-            <a:ext cx="5005169" cy="5918200"/>
-          </a:xfrm>
-          <a:prstGeom prst="rect">
-            <a:avLst/>
-          </a:prstGeom>
-        </p:spPr>
-      </p:pic>
-      <p:sp>
-        <p:nvSpPr>
-          <p:cNvPr id="3" name="TextBox 2">
-            <a:extLst>
-              <a:ext uri="{FF2B5EF4-FFF2-40B4-BE49-F238E27FC236}">
-                <a16:creationId xmlns:a16="http://schemas.microsoft.com/office/drawing/2014/main" id="{5A9966EE-FAC1-274E-90CA-F50154FF7E2C}"/>
-              </a:ext>
-            </a:extLst>
-          </p:cNvPr>
-          <p:cNvSpPr txBox="1"/>
-          <p:nvPr/>
-        </p:nvSpPr>
-        <p:spPr>
-          <a:xfrm>
-            <a:off x="83127" y="1622688"/>
-            <a:ext cx="5652655" cy="4031873"/>
-          </a:xfrm>
-          <a:prstGeom prst="rect">
-            <a:avLst/>
-          </a:prstGeom>
-          <a:noFill/>
-        </p:spPr>
-        <p:txBody>
-          <a:bodyPr wrap="square" rtlCol="0">
-            <a:spAutoFit/>
-          </a:bodyPr>
-          <a:lstStyle/>
-          <a:p>
-            <a:r>
-              <a:rPr lang="en-US" sz="1600" dirty="0"/>
-              <a:t>Ralph Kimball’s paradigm: </a:t>
-            </a:r>
-          </a:p>
-          <a:p>
-            <a:endParaRPr lang="en-US" sz="1600" dirty="0"/>
-          </a:p>
-          <a:p>
-            <a:pPr marL="285750" indent="-285750">
-              <a:buFont typeface="Arial" panose="020B0604020202020204" pitchFamily="34" charset="0"/>
-              <a:buChar char="•"/>
-            </a:pPr>
-            <a:r>
-              <a:rPr lang="en-US" sz="1600" dirty="0"/>
-              <a:t>Each department in a company has its own </a:t>
-            </a:r>
-            <a:r>
-              <a:rPr lang="en-US" sz="1600" b="1" dirty="0">
-                <a:solidFill>
-                  <a:srgbClr val="FF0000"/>
-                </a:solidFill>
-              </a:rPr>
-              <a:t>Data Mart (DM)</a:t>
-            </a:r>
-            <a:r>
-              <a:rPr lang="en-US" sz="1600" dirty="0"/>
-              <a:t>. The company's </a:t>
-            </a:r>
-            <a:r>
-              <a:rPr lang="en-US" sz="1600" b="1" dirty="0"/>
-              <a:t>DW (Data Warehouse)</a:t>
-            </a:r>
-            <a:r>
-              <a:rPr lang="en-US" sz="1600" dirty="0"/>
-              <a:t> is the conglomerate of all </a:t>
-            </a:r>
-            <a:r>
-              <a:rPr lang="en-US" sz="1600" b="1" dirty="0">
-                <a:solidFill>
-                  <a:srgbClr val="FF0000"/>
-                </a:solidFill>
-              </a:rPr>
-              <a:t>DMs</a:t>
-            </a:r>
-            <a:r>
-              <a:rPr lang="en-US" sz="1600" dirty="0"/>
-              <a:t>.</a:t>
-            </a:r>
-          </a:p>
-          <a:p>
-            <a:pPr marL="285750" indent="-285750">
-              <a:buFont typeface="Arial" panose="020B0604020202020204" pitchFamily="34" charset="0"/>
-              <a:buChar char="•"/>
-            </a:pPr>
-            <a:r>
-              <a:rPr lang="en-US" sz="1600" dirty="0"/>
-              <a:t>Information is always stored in the </a:t>
-            </a:r>
-            <a:r>
-              <a:rPr lang="en-US" sz="1600" b="1" dirty="0">
-                <a:solidFill>
-                  <a:srgbClr val="00B050"/>
-                </a:solidFill>
-              </a:rPr>
-              <a:t>dimensional model</a:t>
-            </a:r>
-            <a:r>
-              <a:rPr lang="en-US" sz="1600" dirty="0"/>
-              <a:t>.</a:t>
-            </a:r>
-          </a:p>
-          <a:p>
-            <a:endParaRPr lang="en-US" sz="1600" dirty="0"/>
-          </a:p>
-          <a:p>
-            <a:endParaRPr lang="en-US" sz="1600" dirty="0"/>
-          </a:p>
-          <a:p>
-            <a:endParaRPr lang="en-US" sz="1600" dirty="0"/>
-          </a:p>
-          <a:p>
-            <a:endParaRPr lang="en-US" sz="1600" dirty="0"/>
-          </a:p>
-          <a:p>
-            <a:r>
-              <a:rPr lang="en-US" sz="1600" dirty="0"/>
-              <a:t>Bill </a:t>
-            </a:r>
-            <a:r>
-              <a:rPr lang="en-US" sz="1600" dirty="0" err="1"/>
-              <a:t>Inmon’s</a:t>
-            </a:r>
-            <a:r>
-              <a:rPr lang="en-US" sz="1600" dirty="0"/>
-              <a:t> paradigm: </a:t>
-            </a:r>
-          </a:p>
-          <a:p>
-            <a:endParaRPr lang="en-US" sz="1600" dirty="0"/>
-          </a:p>
-          <a:p>
-            <a:pPr marL="285750" indent="-285750">
-              <a:buFont typeface="Arial" panose="020B0604020202020204" pitchFamily="34" charset="0"/>
-              <a:buChar char="•"/>
-            </a:pPr>
-            <a:r>
-              <a:rPr lang="en-US" sz="1600" dirty="0"/>
-              <a:t>A company has </a:t>
-            </a:r>
-            <a:r>
-              <a:rPr lang="en-US" sz="1600" b="1" dirty="0">
-                <a:solidFill>
-                  <a:srgbClr val="FF0000"/>
-                </a:solidFill>
-              </a:rPr>
-              <a:t>one central DW</a:t>
-            </a:r>
-            <a:r>
-              <a:rPr lang="en-US" sz="1600" dirty="0"/>
-              <a:t> (Data </a:t>
-            </a:r>
-            <a:r>
-              <a:rPr lang="en-US" sz="1600" dirty="0" err="1"/>
-              <a:t>Warehous</a:t>
-            </a:r>
-            <a:r>
-              <a:rPr lang="en-US" sz="1600" dirty="0"/>
-              <a:t>). </a:t>
-            </a:r>
-            <a:br>
-              <a:rPr lang="en-US" sz="1600" dirty="0"/>
-            </a:br>
-            <a:r>
-              <a:rPr lang="en-US" sz="1600" dirty="0"/>
-              <a:t>Data Marts (</a:t>
-            </a:r>
-            <a:r>
-              <a:rPr lang="en-US" sz="1600" b="1" dirty="0">
-                <a:solidFill>
-                  <a:srgbClr val="FF0000"/>
-                </a:solidFill>
-              </a:rPr>
-              <a:t>DMs</a:t>
-            </a:r>
-            <a:r>
-              <a:rPr lang="en-US" sz="1600" dirty="0"/>
-              <a:t>) source their data from the </a:t>
-            </a:r>
-            <a:r>
-              <a:rPr lang="en-US" sz="1600" b="1" dirty="0">
-                <a:solidFill>
-                  <a:srgbClr val="FF0000"/>
-                </a:solidFill>
-              </a:rPr>
-              <a:t>DW</a:t>
-            </a:r>
-            <a:r>
-              <a:rPr lang="en-US" sz="1600" dirty="0"/>
-              <a:t>.  </a:t>
-            </a:r>
-          </a:p>
-          <a:p>
-            <a:pPr marL="285750" indent="-285750">
-              <a:buFont typeface="Arial" panose="020B0604020202020204" pitchFamily="34" charset="0"/>
-              <a:buChar char="•"/>
-            </a:pPr>
-            <a:r>
-              <a:rPr lang="en-US" sz="1600" dirty="0"/>
-              <a:t>In the </a:t>
-            </a:r>
-            <a:r>
-              <a:rPr lang="en-US" sz="1600" b="1" dirty="0">
-                <a:solidFill>
-                  <a:srgbClr val="FF0000"/>
-                </a:solidFill>
-              </a:rPr>
-              <a:t>DW</a:t>
-            </a:r>
-            <a:r>
-              <a:rPr lang="en-US" sz="1600" dirty="0"/>
-              <a:t>, information is stored in </a:t>
-            </a:r>
-            <a:r>
-              <a:rPr lang="en-US" sz="1600" b="1" dirty="0">
-                <a:solidFill>
-                  <a:srgbClr val="00B050"/>
-                </a:solidFill>
-              </a:rPr>
-              <a:t>3rd normal form</a:t>
-            </a:r>
-            <a:r>
-              <a:rPr lang="en-US" sz="1600" dirty="0"/>
-              <a:t>.</a:t>
-            </a:r>
-            <a:br>
-              <a:rPr lang="en-US" sz="1600" dirty="0"/>
-            </a:br>
-            <a:r>
-              <a:rPr lang="en-US" sz="1600" dirty="0"/>
-              <a:t>( </a:t>
-            </a:r>
-            <a:r>
-              <a:rPr lang="en-US" sz="1600" dirty="0">
-                <a:hlinkClick r:id="rId3"/>
-              </a:rPr>
-              <a:t>https://en.wikipedia.org/wiki/Third_normal_form</a:t>
-            </a:r>
-            <a:r>
-              <a:rPr lang="en-US" sz="1600" dirty="0"/>
-              <a:t> )</a:t>
-            </a:r>
-          </a:p>
-        </p:txBody>
-      </p:sp>
-      <p:sp>
-        <p:nvSpPr>
-          <p:cNvPr id="4" name="TextBox 3">
-            <a:extLst>
-              <a:ext uri="{FF2B5EF4-FFF2-40B4-BE49-F238E27FC236}">
-                <a16:creationId xmlns:a16="http://schemas.microsoft.com/office/drawing/2014/main" id="{18B93201-B580-8F45-9FB0-6ADE7776ADE3}"/>
-              </a:ext>
-            </a:extLst>
-          </p:cNvPr>
-          <p:cNvSpPr txBox="1"/>
-          <p:nvPr/>
-        </p:nvSpPr>
-        <p:spPr>
-          <a:xfrm>
-            <a:off x="83127" y="0"/>
-            <a:ext cx="3087585" cy="523220"/>
-          </a:xfrm>
-          <a:prstGeom prst="rect">
-            <a:avLst/>
-          </a:prstGeom>
-          <a:noFill/>
-        </p:spPr>
-        <p:txBody>
-          <a:bodyPr wrap="square" rtlCol="0">
-            <a:spAutoFit/>
-          </a:bodyPr>
-          <a:lstStyle/>
-          <a:p>
-            <a:r>
-              <a:rPr lang="en-US" sz="2800" b="1" dirty="0" err="1"/>
-              <a:t>Inmon</a:t>
-            </a:r>
-            <a:r>
-              <a:rPr lang="en-US" sz="2800" b="1" dirty="0"/>
-              <a:t> vs Kimball </a:t>
-            </a:r>
-          </a:p>
-        </p:txBody>
-      </p:sp>
-    </p:spTree>
-    <p:extLst>
-      <p:ext uri="{BB962C8B-B14F-4D97-AF65-F5344CB8AC3E}">
-        <p14:creationId xmlns:p14="http://schemas.microsoft.com/office/powerpoint/2010/main" val="3750064097"/>
-      </p:ext>
-    </p:extLst>
-  </p:cSld>
-  <p:clrMapOvr>
-    <a:masterClrMapping/>
-  </p:clrMapOvr>
-</p:sld>
-</file>
-
-<file path=ppt/slides/slide5.xml><?xml version="1.0" encoding="utf-8"?>
-<p:sld xmlns:a="http://schemas.openxmlformats.org/drawingml/2006/main" xmlns:r="http://schemas.openxmlformats.org/officeDocument/2006/relationships" xmlns:p="http://schemas.openxmlformats.org/presentationml/2006/main">
-  <p:cSld>
-    <p:spTree>
-      <p:nvGrpSpPr>
-        <p:cNvPr id="1" name=""/>
-        <p:cNvGrpSpPr/>
-        <p:nvPr/>
-      </p:nvGrpSpPr>
-      <p:grpSpPr>
-        <a:xfrm>
-          <a:off x="0" y="0"/>
-          <a:ext cx="0" cy="0"/>
-          <a:chOff x="0" y="0"/>
-          <a:chExt cx="0" cy="0"/>
-        </a:xfrm>
-      </p:grpSpPr>
       <p:pic>
         <p:nvPicPr>
           <p:cNvPr id="2" name="Picture 1">
@@ -6184,8 +5267,8 @@
         </p:nvSpPr>
         <p:spPr>
           <a:xfrm>
-            <a:off x="83127" y="523220"/>
-            <a:ext cx="4868883" cy="4832092"/>
+            <a:off x="83127" y="606348"/>
+            <a:ext cx="4868883" cy="5878532"/>
           </a:xfrm>
           <a:prstGeom prst="rect">
             <a:avLst/>
@@ -6354,7 +5437,55 @@
             </a:r>
             <a:r>
               <a:rPr lang="en-US" sz="1400" dirty="0"/>
-              <a:t>: from departments to central.</a:t>
+              <a:t>: from departments to central</a:t>
+            </a:r>
+          </a:p>
+          <a:p>
+            <a:pPr marL="285750" indent="-285750">
+              <a:buFont typeface="Arial" panose="020B0604020202020204" pitchFamily="34" charset="0"/>
+              <a:buChar char="•"/>
+            </a:pPr>
+            <a:endParaRPr lang="en-US" sz="1400" dirty="0"/>
+          </a:p>
+          <a:p>
+            <a:r>
+              <a:rPr lang="en-US" sz="1400" dirty="0">
+                <a:solidFill>
+                  <a:srgbClr val="00B050"/>
+                </a:solidFill>
+              </a:rPr>
+              <a:t>Now 30-40 years later any smart phone is more powerful than "huge" DW systems of </a:t>
+            </a:r>
+            <a:r>
+              <a:rPr lang="en-US" sz="1400" dirty="0" err="1">
+                <a:solidFill>
+                  <a:srgbClr val="00B050"/>
+                </a:solidFill>
+              </a:rPr>
+              <a:t>Inmon</a:t>
+            </a:r>
+            <a:r>
+              <a:rPr lang="en-US" sz="1400" dirty="0">
+                <a:solidFill>
+                  <a:srgbClr val="00B050"/>
+                </a:solidFill>
+              </a:rPr>
+              <a:t> &amp; Kimball's era.</a:t>
+            </a:r>
+          </a:p>
+          <a:p>
+            <a:endParaRPr lang="en-US" sz="1400" dirty="0"/>
+          </a:p>
+          <a:p>
+            <a:r>
+              <a:rPr lang="en-US" sz="1200" dirty="0">
+                <a:hlinkClick r:id="rId3"/>
+              </a:rPr>
+              <a:t>https://www.dataversity.net/a-short-history-of-data-warehousing/</a:t>
+            </a:r>
+            <a:r>
+              <a:rPr lang="en-US" sz="1200" dirty="0"/>
+              <a:t> </a:t>
             </a:r>
           </a:p>
         </p:txBody>
@@ -6374,7 +5505,7 @@
           <p:nvPr/>
         </p:nvPicPr>
         <p:blipFill>
-          <a:blip r:embed="rId3">
+          <a:blip r:embed="rId4">
             <a:extLst>
               <a:ext uri="{28A0092B-C50C-407E-A947-70E740481C1C}">
                 <a14:useLocalDpi xmlns:a14="http://schemas.microsoft.com/office/drawing/2010/main"/>
@@ -6421,7 +5552,7 @@
           <p:nvPr/>
         </p:nvPicPr>
         <p:blipFill>
-          <a:blip r:embed="rId4" cstate="email">
+          <a:blip r:embed="rId5" cstate="email">
             <a:extLst>
               <a:ext uri="{28A0092B-C50C-407E-A947-70E740481C1C}">
                 <a14:useLocalDpi xmlns:a14="http://schemas.microsoft.com/office/drawing/2010/main"/>
@@ -6468,7 +5599,7 @@
           <p:nvPr/>
         </p:nvPicPr>
         <p:blipFill>
-          <a:blip r:embed="rId5" cstate="email">
+          <a:blip r:embed="rId6" cstate="email">
             <a:extLst>
               <a:ext uri="{28A0092B-C50C-407E-A947-70E740481C1C}">
                 <a14:useLocalDpi xmlns:a14="http://schemas.microsoft.com/office/drawing/2010/main"/>
@@ -6504,6 +5635,923 @@
     <p:extLst>
       <p:ext uri="{BB962C8B-B14F-4D97-AF65-F5344CB8AC3E}">
         <p14:creationId xmlns:p14="http://schemas.microsoft.com/office/powerpoint/2010/main" val="4053138789"/>
+      </p:ext>
+    </p:extLst>
+  </p:cSld>
+  <p:clrMapOvr>
+    <a:masterClrMapping/>
+  </p:clrMapOvr>
+</p:sld>
+</file>
+
+<file path=ppt/slides/slide4.xml><?xml version="1.0" encoding="utf-8"?>
+<p:sld xmlns:a="http://schemas.openxmlformats.org/drawingml/2006/main" xmlns:r="http://schemas.openxmlformats.org/officeDocument/2006/relationships" xmlns:p="http://schemas.openxmlformats.org/presentationml/2006/main">
+  <p:cSld>
+    <p:spTree>
+      <p:nvGrpSpPr>
+        <p:cNvPr id="1" name=""/>
+        <p:cNvGrpSpPr/>
+        <p:nvPr/>
+      </p:nvGrpSpPr>
+      <p:grpSpPr>
+        <a:xfrm>
+          <a:off x="0" y="0"/>
+          <a:ext cx="0" cy="0"/>
+          <a:chOff x="0" y="0"/>
+          <a:chExt cx="0" cy="0"/>
+        </a:xfrm>
+      </p:grpSpPr>
+      <p:sp>
+        <p:nvSpPr>
+          <p:cNvPr id="2" name="TextBox 1">
+            <a:extLst>
+              <a:ext uri="{FF2B5EF4-FFF2-40B4-BE49-F238E27FC236}">
+                <a16:creationId xmlns:a16="http://schemas.microsoft.com/office/drawing/2014/main" id="{1FF97A56-4D4A-3F47-9FFF-C6919AE57058}"/>
+              </a:ext>
+            </a:extLst>
+          </p:cNvPr>
+          <p:cNvSpPr txBox="1"/>
+          <p:nvPr/>
+        </p:nvSpPr>
+        <p:spPr>
+          <a:xfrm>
+            <a:off x="142504" y="118753"/>
+            <a:ext cx="3857995" cy="523220"/>
+          </a:xfrm>
+          <a:prstGeom prst="rect">
+            <a:avLst/>
+          </a:prstGeom>
+          <a:noFill/>
+        </p:spPr>
+        <p:txBody>
+          <a:bodyPr wrap="square" rtlCol="0">
+            <a:spAutoFit/>
+          </a:bodyPr>
+          <a:lstStyle/>
+          <a:p>
+            <a:r>
+              <a:rPr lang="en-US" sz="2800" b="1" dirty="0"/>
+              <a:t>Kimball DW Framework</a:t>
+            </a:r>
+          </a:p>
+        </p:txBody>
+      </p:sp>
+      <p:pic>
+        <p:nvPicPr>
+          <p:cNvPr id="1028" name="Picture 4" descr="Kimball Group | Dimensional Data Warehousing Experts">
+            <a:extLst>
+              <a:ext uri="{FF2B5EF4-FFF2-40B4-BE49-F238E27FC236}">
+                <a16:creationId xmlns:a16="http://schemas.microsoft.com/office/drawing/2014/main" id="{54BE1611-AB11-B843-B335-0B1AD870C097}"/>
+              </a:ext>
+            </a:extLst>
+          </p:cNvPr>
+          <p:cNvPicPr>
+            <a:picLocks noChangeAspect="1" noChangeArrowheads="1"/>
+          </p:cNvPicPr>
+          <p:nvPr/>
+        </p:nvPicPr>
+        <p:blipFill>
+          <a:blip r:embed="rId2" cstate="email">
+            <a:extLst>
+              <a:ext uri="{28A0092B-C50C-407E-A947-70E740481C1C}">
+                <a14:useLocalDpi xmlns:a14="http://schemas.microsoft.com/office/drawing/2010/main"/>
+              </a:ext>
+            </a:extLst>
+          </a:blip>
+          <a:srcRect/>
+          <a:stretch>
+            <a:fillRect/>
+          </a:stretch>
+        </p:blipFill>
+        <p:spPr bwMode="auto">
+          <a:xfrm>
+            <a:off x="2591645" y="781336"/>
+            <a:ext cx="1720112" cy="2013789"/>
+          </a:xfrm>
+          <a:prstGeom prst="rect">
+            <a:avLst/>
+          </a:prstGeom>
+          <a:noFill/>
+          <a:extLst>
+            <a:ext uri="{909E8E84-426E-40DD-AFC4-6F175D3DCCD1}">
+              <a14:hiddenFill xmlns:a14="http://schemas.microsoft.com/office/drawing/2010/main">
+                <a:solidFill>
+                  <a:srgbClr val="FFFFFF"/>
+                </a:solidFill>
+              </a14:hiddenFill>
+            </a:ext>
+          </a:extLst>
+        </p:spPr>
+      </p:pic>
+      <p:sp>
+        <p:nvSpPr>
+          <p:cNvPr id="3" name="TextBox 2">
+            <a:extLst>
+              <a:ext uri="{FF2B5EF4-FFF2-40B4-BE49-F238E27FC236}">
+                <a16:creationId xmlns:a16="http://schemas.microsoft.com/office/drawing/2014/main" id="{CB6AC39B-5121-BE4B-B106-D28C9291FF2B}"/>
+              </a:ext>
+            </a:extLst>
+          </p:cNvPr>
+          <p:cNvSpPr txBox="1"/>
+          <p:nvPr/>
+        </p:nvSpPr>
+        <p:spPr>
+          <a:xfrm>
+            <a:off x="1949557" y="2820188"/>
+            <a:ext cx="2901843" cy="584775"/>
+          </a:xfrm>
+          <a:prstGeom prst="rect">
+            <a:avLst/>
+          </a:prstGeom>
+          <a:noFill/>
+        </p:spPr>
+        <p:txBody>
+          <a:bodyPr wrap="square" rtlCol="0">
+            <a:spAutoFit/>
+          </a:bodyPr>
+          <a:lstStyle/>
+          <a:p>
+            <a:r>
+              <a:rPr lang="en-US" sz="1600" dirty="0"/>
+              <a:t>Kimball Group – closed in 2015</a:t>
+            </a:r>
+          </a:p>
+          <a:p>
+            <a:r>
+              <a:rPr lang="en-US" sz="1600" dirty="0">
+                <a:hlinkClick r:id="rId3"/>
+              </a:rPr>
+              <a:t>https://www.kimballgroup.com/</a:t>
+            </a:r>
+            <a:r>
+              <a:rPr lang="en-US" sz="1600" dirty="0"/>
+              <a:t> </a:t>
+            </a:r>
+          </a:p>
+        </p:txBody>
+      </p:sp>
+      <p:pic>
+        <p:nvPicPr>
+          <p:cNvPr id="1032" name="Picture 8">
+            <a:extLst>
+              <a:ext uri="{FF2B5EF4-FFF2-40B4-BE49-F238E27FC236}">
+                <a16:creationId xmlns:a16="http://schemas.microsoft.com/office/drawing/2014/main" id="{25FB8E3B-0DC1-B943-B985-7D05DDC29557}"/>
+              </a:ext>
+            </a:extLst>
+          </p:cNvPr>
+          <p:cNvPicPr>
+            <a:picLocks noChangeAspect="1" noChangeArrowheads="1"/>
+          </p:cNvPicPr>
+          <p:nvPr/>
+        </p:nvPicPr>
+        <p:blipFill>
+          <a:blip r:embed="rId4" cstate="email">
+            <a:extLst>
+              <a:ext uri="{28A0092B-C50C-407E-A947-70E740481C1C}">
+                <a14:useLocalDpi xmlns:a14="http://schemas.microsoft.com/office/drawing/2010/main"/>
+              </a:ext>
+            </a:extLst>
+          </a:blip>
+          <a:srcRect/>
+          <a:stretch>
+            <a:fillRect/>
+          </a:stretch>
+        </p:blipFill>
+        <p:spPr bwMode="auto">
+          <a:xfrm>
+            <a:off x="142504" y="4160462"/>
+            <a:ext cx="1807053" cy="2277069"/>
+          </a:xfrm>
+          <a:prstGeom prst="rect">
+            <a:avLst/>
+          </a:prstGeom>
+          <a:noFill/>
+          <a:extLst>
+            <a:ext uri="{909E8E84-426E-40DD-AFC4-6F175D3DCCD1}">
+              <a14:hiddenFill xmlns:a14="http://schemas.microsoft.com/office/drawing/2010/main">
+                <a:solidFill>
+                  <a:srgbClr val="FFFFFF"/>
+                </a:solidFill>
+              </a14:hiddenFill>
+            </a:ext>
+          </a:extLst>
+        </p:spPr>
+      </p:pic>
+      <p:pic>
+        <p:nvPicPr>
+          <p:cNvPr id="1034" name="Picture 10" descr="Kimball's Data Warehouse Toolkit Classics, 3 Volume Set">
+            <a:extLst>
+              <a:ext uri="{FF2B5EF4-FFF2-40B4-BE49-F238E27FC236}">
+                <a16:creationId xmlns:a16="http://schemas.microsoft.com/office/drawing/2014/main" id="{E667604D-59E9-1345-9E47-35276E3959DF}"/>
+              </a:ext>
+            </a:extLst>
+          </p:cNvPr>
+          <p:cNvPicPr>
+            <a:picLocks noChangeAspect="1" noChangeArrowheads="1"/>
+          </p:cNvPicPr>
+          <p:nvPr/>
+        </p:nvPicPr>
+        <p:blipFill rotWithShape="1">
+          <a:blip r:embed="rId5" cstate="email">
+            <a:extLst>
+              <a:ext uri="{28A0092B-C50C-407E-A947-70E740481C1C}">
+                <a14:useLocalDpi xmlns:a14="http://schemas.microsoft.com/office/drawing/2010/main"/>
+              </a:ext>
+            </a:extLst>
+          </a:blip>
+          <a:srcRect/>
+          <a:stretch/>
+        </p:blipFill>
+        <p:spPr bwMode="auto">
+          <a:xfrm>
+            <a:off x="2793999" y="4160461"/>
+            <a:ext cx="1842059" cy="2277069"/>
+          </a:xfrm>
+          <a:prstGeom prst="rect">
+            <a:avLst/>
+          </a:prstGeom>
+          <a:noFill/>
+          <a:extLst>
+            <a:ext uri="{909E8E84-426E-40DD-AFC4-6F175D3DCCD1}">
+              <a14:hiddenFill xmlns:a14="http://schemas.microsoft.com/office/drawing/2010/main">
+                <a:solidFill>
+                  <a:srgbClr val="FFFFFF"/>
+                </a:solidFill>
+              </a14:hiddenFill>
+            </a:ext>
+          </a:extLst>
+        </p:spPr>
+      </p:pic>
+      <p:sp>
+        <p:nvSpPr>
+          <p:cNvPr id="9" name="TextBox 8">
+            <a:extLst>
+              <a:ext uri="{FF2B5EF4-FFF2-40B4-BE49-F238E27FC236}">
+                <a16:creationId xmlns:a16="http://schemas.microsoft.com/office/drawing/2014/main" id="{5FE68235-DA87-9642-AF27-C4835BC23BB7}"/>
+              </a:ext>
+            </a:extLst>
+          </p:cNvPr>
+          <p:cNvSpPr txBox="1"/>
+          <p:nvPr/>
+        </p:nvSpPr>
+        <p:spPr>
+          <a:xfrm>
+            <a:off x="8191503" y="118753"/>
+            <a:ext cx="3857995" cy="523220"/>
+          </a:xfrm>
+          <a:prstGeom prst="rect">
+            <a:avLst/>
+          </a:prstGeom>
+          <a:noFill/>
+        </p:spPr>
+        <p:txBody>
+          <a:bodyPr wrap="square" rtlCol="0">
+            <a:spAutoFit/>
+          </a:bodyPr>
+          <a:lstStyle/>
+          <a:p>
+            <a:r>
+              <a:rPr lang="en-US" sz="2800" b="1" dirty="0" err="1"/>
+              <a:t>Inmon</a:t>
+            </a:r>
+            <a:r>
+              <a:rPr lang="en-US" sz="2800" b="1" dirty="0"/>
+              <a:t> DW Framework</a:t>
+            </a:r>
+          </a:p>
+        </p:txBody>
+      </p:sp>
+      <p:pic>
+        <p:nvPicPr>
+          <p:cNvPr id="10" name="Picture 6">
+            <a:extLst>
+              <a:ext uri="{FF2B5EF4-FFF2-40B4-BE49-F238E27FC236}">
+                <a16:creationId xmlns:a16="http://schemas.microsoft.com/office/drawing/2014/main" id="{12840A34-CCB8-574E-9DBC-EFB4880CEADB}"/>
+              </a:ext>
+            </a:extLst>
+          </p:cNvPr>
+          <p:cNvPicPr>
+            <a:picLocks noChangeAspect="1" noChangeArrowheads="1"/>
+          </p:cNvPicPr>
+          <p:nvPr/>
+        </p:nvPicPr>
+        <p:blipFill>
+          <a:blip r:embed="rId6" cstate="email">
+            <a:extLst>
+              <a:ext uri="{28A0092B-C50C-407E-A947-70E740481C1C}">
+                <a14:useLocalDpi xmlns:a14="http://schemas.microsoft.com/office/drawing/2010/main"/>
+              </a:ext>
+            </a:extLst>
+          </a:blip>
+          <a:srcRect/>
+          <a:stretch>
+            <a:fillRect/>
+          </a:stretch>
+        </p:blipFill>
+        <p:spPr bwMode="auto">
+          <a:xfrm>
+            <a:off x="9207500" y="852270"/>
+            <a:ext cx="1249610" cy="1816100"/>
+          </a:xfrm>
+          <a:prstGeom prst="rect">
+            <a:avLst/>
+          </a:prstGeom>
+          <a:noFill/>
+          <a:extLst>
+            <a:ext uri="{909E8E84-426E-40DD-AFC4-6F175D3DCCD1}">
+              <a14:hiddenFill xmlns:a14="http://schemas.microsoft.com/office/drawing/2010/main">
+                <a:solidFill>
+                  <a:srgbClr val="FFFFFF"/>
+                </a:solidFill>
+              </a14:hiddenFill>
+            </a:ext>
+          </a:extLst>
+        </p:spPr>
+      </p:pic>
+      <p:sp>
+        <p:nvSpPr>
+          <p:cNvPr id="11" name="TextBox 10">
+            <a:extLst>
+              <a:ext uri="{FF2B5EF4-FFF2-40B4-BE49-F238E27FC236}">
+                <a16:creationId xmlns:a16="http://schemas.microsoft.com/office/drawing/2014/main" id="{EE04A850-E9C3-DB4B-8CFD-9FC3A00FB0FB}"/>
+              </a:ext>
+            </a:extLst>
+          </p:cNvPr>
+          <p:cNvSpPr txBox="1"/>
+          <p:nvPr/>
+        </p:nvSpPr>
+        <p:spPr>
+          <a:xfrm>
+            <a:off x="8890000" y="2687467"/>
+            <a:ext cx="1905000" cy="584775"/>
+          </a:xfrm>
+          <a:prstGeom prst="rect">
+            <a:avLst/>
+          </a:prstGeom>
+          <a:noFill/>
+        </p:spPr>
+        <p:txBody>
+          <a:bodyPr wrap="square" rtlCol="0">
+            <a:spAutoFit/>
+          </a:bodyPr>
+          <a:lstStyle/>
+          <a:p>
+            <a:pPr algn="ctr"/>
+            <a:r>
+              <a:rPr lang="en-US" sz="1600" dirty="0"/>
+              <a:t>William H. </a:t>
+            </a:r>
+            <a:r>
+              <a:rPr lang="en-US" sz="1600" dirty="0" err="1"/>
+              <a:t>Inmon</a:t>
+            </a:r>
+            <a:endParaRPr lang="en-US" sz="1600" dirty="0"/>
+          </a:p>
+          <a:p>
+            <a:pPr algn="ctr"/>
+            <a:r>
+              <a:rPr lang="en-US" sz="1600" dirty="0"/>
+              <a:t>(1945 – present)</a:t>
+            </a:r>
+          </a:p>
+        </p:txBody>
+      </p:sp>
+      <p:pic>
+        <p:nvPicPr>
+          <p:cNvPr id="12" name="Picture 2">
+            <a:extLst>
+              <a:ext uri="{FF2B5EF4-FFF2-40B4-BE49-F238E27FC236}">
+                <a16:creationId xmlns:a16="http://schemas.microsoft.com/office/drawing/2014/main" id="{415DA38A-988E-0D40-BBF8-D685231221F0}"/>
+              </a:ext>
+            </a:extLst>
+          </p:cNvPr>
+          <p:cNvPicPr>
+            <a:picLocks noChangeAspect="1" noChangeArrowheads="1"/>
+          </p:cNvPicPr>
+          <p:nvPr/>
+        </p:nvPicPr>
+        <p:blipFill>
+          <a:blip r:embed="rId7" cstate="email">
+            <a:extLst>
+              <a:ext uri="{28A0092B-C50C-407E-A947-70E740481C1C}">
+                <a14:useLocalDpi xmlns:a14="http://schemas.microsoft.com/office/drawing/2010/main"/>
+              </a:ext>
+            </a:extLst>
+          </a:blip>
+          <a:srcRect/>
+          <a:stretch>
+            <a:fillRect/>
+          </a:stretch>
+        </p:blipFill>
+        <p:spPr bwMode="auto">
+          <a:xfrm>
+            <a:off x="7964060" y="4160461"/>
+            <a:ext cx="1848980" cy="2277069"/>
+          </a:xfrm>
+          <a:prstGeom prst="rect">
+            <a:avLst/>
+          </a:prstGeom>
+          <a:noFill/>
+          <a:extLst>
+            <a:ext uri="{909E8E84-426E-40DD-AFC4-6F175D3DCCD1}">
+              <a14:hiddenFill xmlns:a14="http://schemas.microsoft.com/office/drawing/2010/main">
+                <a:solidFill>
+                  <a:srgbClr val="FFFFFF"/>
+                </a:solidFill>
+              </a14:hiddenFill>
+            </a:ext>
+          </a:extLst>
+        </p:spPr>
+      </p:pic>
+      <p:pic>
+        <p:nvPicPr>
+          <p:cNvPr id="13" name="Picture 4">
+            <a:extLst>
+              <a:ext uri="{FF2B5EF4-FFF2-40B4-BE49-F238E27FC236}">
+                <a16:creationId xmlns:a16="http://schemas.microsoft.com/office/drawing/2014/main" id="{DA81332F-2F81-5B45-954D-22A2A17F45E3}"/>
+              </a:ext>
+            </a:extLst>
+          </p:cNvPr>
+          <p:cNvPicPr>
+            <a:picLocks noChangeAspect="1" noChangeArrowheads="1"/>
+          </p:cNvPicPr>
+          <p:nvPr/>
+        </p:nvPicPr>
+        <p:blipFill>
+          <a:blip r:embed="rId8" cstate="email">
+            <a:extLst>
+              <a:ext uri="{28A0092B-C50C-407E-A947-70E740481C1C}">
+                <a14:useLocalDpi xmlns:a14="http://schemas.microsoft.com/office/drawing/2010/main"/>
+              </a:ext>
+            </a:extLst>
+          </a:blip>
+          <a:srcRect/>
+          <a:stretch>
+            <a:fillRect/>
+          </a:stretch>
+        </p:blipFill>
+        <p:spPr bwMode="auto">
+          <a:xfrm>
+            <a:off x="10169432" y="4160461"/>
+            <a:ext cx="1743167" cy="2277069"/>
+          </a:xfrm>
+          <a:prstGeom prst="rect">
+            <a:avLst/>
+          </a:prstGeom>
+          <a:noFill/>
+          <a:extLst>
+            <a:ext uri="{909E8E84-426E-40DD-AFC4-6F175D3DCCD1}">
+              <a14:hiddenFill xmlns:a14="http://schemas.microsoft.com/office/drawing/2010/main">
+                <a:solidFill>
+                  <a:srgbClr val="FFFFFF"/>
+                </a:solidFill>
+              </a14:hiddenFill>
+            </a:ext>
+          </a:extLst>
+        </p:spPr>
+      </p:pic>
+      <p:pic>
+        <p:nvPicPr>
+          <p:cNvPr id="1036" name="Picture 12" descr="Ralph Kimball data warehouse architecture">
+            <a:extLst>
+              <a:ext uri="{FF2B5EF4-FFF2-40B4-BE49-F238E27FC236}">
+                <a16:creationId xmlns:a16="http://schemas.microsoft.com/office/drawing/2014/main" id="{4B49ABE2-7BEF-644F-91D4-C8C012C6F9F9}"/>
+              </a:ext>
+            </a:extLst>
+          </p:cNvPr>
+          <p:cNvPicPr>
+            <a:picLocks noChangeAspect="1" noChangeArrowheads="1"/>
+          </p:cNvPicPr>
+          <p:nvPr/>
+        </p:nvPicPr>
+        <p:blipFill>
+          <a:blip r:embed="rId9">
+            <a:extLst>
+              <a:ext uri="{28A0092B-C50C-407E-A947-70E740481C1C}">
+                <a14:useLocalDpi xmlns:a14="http://schemas.microsoft.com/office/drawing/2010/main"/>
+              </a:ext>
+            </a:extLst>
+          </a:blip>
+          <a:srcRect/>
+          <a:stretch>
+            <a:fillRect/>
+          </a:stretch>
+        </p:blipFill>
+        <p:spPr bwMode="auto">
+          <a:xfrm>
+            <a:off x="142504" y="781336"/>
+            <a:ext cx="1592386" cy="2070102"/>
+          </a:xfrm>
+          <a:prstGeom prst="rect">
+            <a:avLst/>
+          </a:prstGeom>
+          <a:noFill/>
+          <a:extLst>
+            <a:ext uri="{909E8E84-426E-40DD-AFC4-6F175D3DCCD1}">
+              <a14:hiddenFill xmlns:a14="http://schemas.microsoft.com/office/drawing/2010/main">
+                <a:solidFill>
+                  <a:srgbClr val="FFFFFF"/>
+                </a:solidFill>
+              </a14:hiddenFill>
+            </a:ext>
+          </a:extLst>
+        </p:spPr>
+      </p:pic>
+      <p:sp>
+        <p:nvSpPr>
+          <p:cNvPr id="15" name="TextBox 14">
+            <a:extLst>
+              <a:ext uri="{FF2B5EF4-FFF2-40B4-BE49-F238E27FC236}">
+                <a16:creationId xmlns:a16="http://schemas.microsoft.com/office/drawing/2014/main" id="{EC47885C-34DB-5E4D-BE91-505AFE558C65}"/>
+              </a:ext>
+            </a:extLst>
+          </p:cNvPr>
+          <p:cNvSpPr txBox="1"/>
+          <p:nvPr/>
+        </p:nvSpPr>
+        <p:spPr>
+          <a:xfrm>
+            <a:off x="34040" y="2851438"/>
+            <a:ext cx="1807053" cy="584775"/>
+          </a:xfrm>
+          <a:prstGeom prst="rect">
+            <a:avLst/>
+          </a:prstGeom>
+          <a:noFill/>
+        </p:spPr>
+        <p:txBody>
+          <a:bodyPr wrap="square" rtlCol="0">
+            <a:spAutoFit/>
+          </a:bodyPr>
+          <a:lstStyle/>
+          <a:p>
+            <a:pPr algn="ctr"/>
+            <a:r>
+              <a:rPr lang="en-US" sz="1600" dirty="0"/>
+              <a:t>Ralph Kimball</a:t>
+            </a:r>
+          </a:p>
+          <a:p>
+            <a:pPr algn="ctr"/>
+            <a:r>
+              <a:rPr lang="en-US" sz="1600" dirty="0"/>
+              <a:t>(1944 – present)</a:t>
+            </a:r>
+          </a:p>
+        </p:txBody>
+      </p:sp>
+    </p:spTree>
+    <p:extLst>
+      <p:ext uri="{BB962C8B-B14F-4D97-AF65-F5344CB8AC3E}">
+        <p14:creationId xmlns:p14="http://schemas.microsoft.com/office/powerpoint/2010/main" val="4190198152"/>
+      </p:ext>
+    </p:extLst>
+  </p:cSld>
+  <p:clrMapOvr>
+    <a:masterClrMapping/>
+  </p:clrMapOvr>
+</p:sld>
+</file>
+
+<file path=ppt/slides/slide5.xml><?xml version="1.0" encoding="utf-8"?>
+<p:sld xmlns:a="http://schemas.openxmlformats.org/drawingml/2006/main" xmlns:r="http://schemas.openxmlformats.org/officeDocument/2006/relationships" xmlns:p="http://schemas.openxmlformats.org/presentationml/2006/main">
+  <p:cSld>
+    <p:spTree>
+      <p:nvGrpSpPr>
+        <p:cNvPr id="1" name=""/>
+        <p:cNvGrpSpPr/>
+        <p:nvPr/>
+      </p:nvGrpSpPr>
+      <p:grpSpPr>
+        <a:xfrm>
+          <a:off x="0" y="0"/>
+          <a:ext cx="0" cy="0"/>
+          <a:chOff x="0" y="0"/>
+          <a:chExt cx="0" cy="0"/>
+        </a:xfrm>
+      </p:grpSpPr>
+      <p:pic>
+        <p:nvPicPr>
+          <p:cNvPr id="2" name="Picture 1">
+            <a:extLst>
+              <a:ext uri="{FF2B5EF4-FFF2-40B4-BE49-F238E27FC236}">
+                <a16:creationId xmlns:a16="http://schemas.microsoft.com/office/drawing/2014/main" id="{F4626B5A-FFA5-2E46-962E-FE8D97840C15}"/>
+              </a:ext>
+            </a:extLst>
+          </p:cNvPr>
+          <p:cNvPicPr>
+            <a:picLocks noChangeAspect="1"/>
+          </p:cNvPicPr>
+          <p:nvPr/>
+        </p:nvPicPr>
+        <p:blipFill>
+          <a:blip r:embed="rId2" cstate="email">
+            <a:extLst>
+              <a:ext uri="{28A0092B-C50C-407E-A947-70E740481C1C}">
+                <a14:useLocalDpi xmlns:a14="http://schemas.microsoft.com/office/drawing/2010/main"/>
+              </a:ext>
+            </a:extLst>
+          </a:blip>
+          <a:stretch>
+            <a:fillRect/>
+          </a:stretch>
+        </p:blipFill>
+        <p:spPr>
+          <a:xfrm>
+            <a:off x="6096000" y="469900"/>
+            <a:ext cx="5005169" cy="5918200"/>
+          </a:xfrm>
+          <a:prstGeom prst="rect">
+            <a:avLst/>
+          </a:prstGeom>
+        </p:spPr>
+      </p:pic>
+      <p:sp>
+        <p:nvSpPr>
+          <p:cNvPr id="3" name="TextBox 2">
+            <a:extLst>
+              <a:ext uri="{FF2B5EF4-FFF2-40B4-BE49-F238E27FC236}">
+                <a16:creationId xmlns:a16="http://schemas.microsoft.com/office/drawing/2014/main" id="{5A9966EE-FAC1-274E-90CA-F50154FF7E2C}"/>
+              </a:ext>
+            </a:extLst>
+          </p:cNvPr>
+          <p:cNvSpPr txBox="1"/>
+          <p:nvPr/>
+        </p:nvSpPr>
+        <p:spPr>
+          <a:xfrm>
+            <a:off x="83127" y="1622688"/>
+            <a:ext cx="5652655" cy="4031873"/>
+          </a:xfrm>
+          <a:prstGeom prst="rect">
+            <a:avLst/>
+          </a:prstGeom>
+          <a:noFill/>
+        </p:spPr>
+        <p:txBody>
+          <a:bodyPr wrap="square" rtlCol="0">
+            <a:spAutoFit/>
+          </a:bodyPr>
+          <a:lstStyle/>
+          <a:p>
+            <a:r>
+              <a:rPr lang="en-US" sz="1600" dirty="0"/>
+              <a:t>Ralph Kimball’s paradigm: </a:t>
+            </a:r>
+          </a:p>
+          <a:p>
+            <a:endParaRPr lang="en-US" sz="1600" dirty="0"/>
+          </a:p>
+          <a:p>
+            <a:pPr marL="285750" indent="-285750">
+              <a:buFont typeface="Arial" panose="020B0604020202020204" pitchFamily="34" charset="0"/>
+              <a:buChar char="•"/>
+            </a:pPr>
+            <a:r>
+              <a:rPr lang="en-US" sz="1600" dirty="0"/>
+              <a:t>Each department in a company has its own </a:t>
+            </a:r>
+            <a:r>
+              <a:rPr lang="en-US" sz="1600" b="1" dirty="0">
+                <a:solidFill>
+                  <a:srgbClr val="FF0000"/>
+                </a:solidFill>
+              </a:rPr>
+              <a:t>Data Mart (DM)</a:t>
+            </a:r>
+            <a:r>
+              <a:rPr lang="en-US" sz="1600" dirty="0"/>
+              <a:t>. The company's </a:t>
+            </a:r>
+            <a:r>
+              <a:rPr lang="en-US" sz="1600" b="1" dirty="0"/>
+              <a:t>DW (Data Warehouse)</a:t>
+            </a:r>
+            <a:r>
+              <a:rPr lang="en-US" sz="1600" dirty="0"/>
+              <a:t> is the conglomerate of all </a:t>
+            </a:r>
+            <a:r>
+              <a:rPr lang="en-US" sz="1600" b="1" dirty="0">
+                <a:solidFill>
+                  <a:srgbClr val="FF0000"/>
+                </a:solidFill>
+              </a:rPr>
+              <a:t>DMs</a:t>
+            </a:r>
+            <a:r>
+              <a:rPr lang="en-US" sz="1600" dirty="0"/>
+              <a:t>.</a:t>
+            </a:r>
+          </a:p>
+          <a:p>
+            <a:pPr marL="285750" indent="-285750">
+              <a:buFont typeface="Arial" panose="020B0604020202020204" pitchFamily="34" charset="0"/>
+              <a:buChar char="•"/>
+            </a:pPr>
+            <a:r>
+              <a:rPr lang="en-US" sz="1600" dirty="0"/>
+              <a:t>Information is always stored in the </a:t>
+            </a:r>
+            <a:r>
+              <a:rPr lang="en-US" sz="1600" b="1" dirty="0">
+                <a:solidFill>
+                  <a:srgbClr val="00B050"/>
+                </a:solidFill>
+              </a:rPr>
+              <a:t>dimensional model</a:t>
+            </a:r>
+            <a:r>
+              <a:rPr lang="en-US" sz="1600" dirty="0"/>
+              <a:t>.</a:t>
+            </a:r>
+          </a:p>
+          <a:p>
+            <a:endParaRPr lang="en-US" sz="1600" dirty="0"/>
+          </a:p>
+          <a:p>
+            <a:endParaRPr lang="en-US" sz="1600" dirty="0"/>
+          </a:p>
+          <a:p>
+            <a:endParaRPr lang="en-US" sz="1600" dirty="0"/>
+          </a:p>
+          <a:p>
+            <a:endParaRPr lang="en-US" sz="1600" dirty="0"/>
+          </a:p>
+          <a:p>
+            <a:r>
+              <a:rPr lang="en-US" sz="1600" dirty="0"/>
+              <a:t>Bill </a:t>
+            </a:r>
+            <a:r>
+              <a:rPr lang="en-US" sz="1600" dirty="0" err="1"/>
+              <a:t>Inmon’s</a:t>
+            </a:r>
+            <a:r>
+              <a:rPr lang="en-US" sz="1600" dirty="0"/>
+              <a:t> paradigm: </a:t>
+            </a:r>
+          </a:p>
+          <a:p>
+            <a:endParaRPr lang="en-US" sz="1600" dirty="0"/>
+          </a:p>
+          <a:p>
+            <a:pPr marL="285750" indent="-285750">
+              <a:buFont typeface="Arial" panose="020B0604020202020204" pitchFamily="34" charset="0"/>
+              <a:buChar char="•"/>
+            </a:pPr>
+            <a:r>
+              <a:rPr lang="en-US" sz="1600" dirty="0"/>
+              <a:t>A company has </a:t>
+            </a:r>
+            <a:r>
+              <a:rPr lang="en-US" sz="1600" b="1" dirty="0">
+                <a:solidFill>
+                  <a:srgbClr val="FF0000"/>
+                </a:solidFill>
+              </a:rPr>
+              <a:t>one central DW</a:t>
+            </a:r>
+            <a:r>
+              <a:rPr lang="en-US" sz="1600" dirty="0"/>
+              <a:t> (Data </a:t>
+            </a:r>
+            <a:r>
+              <a:rPr lang="en-US" sz="1600" dirty="0" err="1"/>
+              <a:t>Warehous</a:t>
+            </a:r>
+            <a:r>
+              <a:rPr lang="en-US" sz="1600" dirty="0"/>
+              <a:t>). </a:t>
+            </a:r>
+            <a:br>
+              <a:rPr lang="en-US" sz="1600" dirty="0"/>
+            </a:br>
+            <a:r>
+              <a:rPr lang="en-US" sz="1600" dirty="0"/>
+              <a:t>Data Marts (</a:t>
+            </a:r>
+            <a:r>
+              <a:rPr lang="en-US" sz="1600" b="1" dirty="0">
+                <a:solidFill>
+                  <a:srgbClr val="FF0000"/>
+                </a:solidFill>
+              </a:rPr>
+              <a:t>DMs</a:t>
+            </a:r>
+            <a:r>
+              <a:rPr lang="en-US" sz="1600" dirty="0"/>
+              <a:t>) source their data from the </a:t>
+            </a:r>
+            <a:r>
+              <a:rPr lang="en-US" sz="1600" b="1" dirty="0">
+                <a:solidFill>
+                  <a:srgbClr val="FF0000"/>
+                </a:solidFill>
+              </a:rPr>
+              <a:t>DW</a:t>
+            </a:r>
+            <a:r>
+              <a:rPr lang="en-US" sz="1600" dirty="0"/>
+              <a:t>.  </a:t>
+            </a:r>
+          </a:p>
+          <a:p>
+            <a:pPr marL="285750" indent="-285750">
+              <a:buFont typeface="Arial" panose="020B0604020202020204" pitchFamily="34" charset="0"/>
+              <a:buChar char="•"/>
+            </a:pPr>
+            <a:r>
+              <a:rPr lang="en-US" sz="1600" dirty="0"/>
+              <a:t>In the </a:t>
+            </a:r>
+            <a:r>
+              <a:rPr lang="en-US" sz="1600" b="1" dirty="0">
+                <a:solidFill>
+                  <a:srgbClr val="FF0000"/>
+                </a:solidFill>
+              </a:rPr>
+              <a:t>DW</a:t>
+            </a:r>
+            <a:r>
+              <a:rPr lang="en-US" sz="1600" dirty="0"/>
+              <a:t>, information is stored in </a:t>
+            </a:r>
+            <a:r>
+              <a:rPr lang="en-US" sz="1600" b="1" dirty="0">
+                <a:solidFill>
+                  <a:srgbClr val="00B050"/>
+                </a:solidFill>
+              </a:rPr>
+              <a:t>3rd normal form</a:t>
+            </a:r>
+            <a:r>
+              <a:rPr lang="en-US" sz="1600" dirty="0"/>
+              <a:t>.</a:t>
+            </a:r>
+            <a:br>
+              <a:rPr lang="en-US" sz="1600" dirty="0"/>
+            </a:br>
+            <a:r>
+              <a:rPr lang="en-US" sz="1600" dirty="0"/>
+              <a:t>( </a:t>
+            </a:r>
+            <a:r>
+              <a:rPr lang="en-US" sz="1600" dirty="0">
+                <a:hlinkClick r:id="rId3"/>
+              </a:rPr>
+              <a:t>https://en.wikipedia.org/wiki/Third_normal_form</a:t>
+            </a:r>
+            <a:r>
+              <a:rPr lang="en-US" sz="1600" dirty="0"/>
+              <a:t> )</a:t>
+            </a:r>
+          </a:p>
+        </p:txBody>
+      </p:sp>
+      <p:sp>
+        <p:nvSpPr>
+          <p:cNvPr id="4" name="TextBox 3">
+            <a:extLst>
+              <a:ext uri="{FF2B5EF4-FFF2-40B4-BE49-F238E27FC236}">
+                <a16:creationId xmlns:a16="http://schemas.microsoft.com/office/drawing/2014/main" id="{18B93201-B580-8F45-9FB0-6ADE7776ADE3}"/>
+              </a:ext>
+            </a:extLst>
+          </p:cNvPr>
+          <p:cNvSpPr txBox="1"/>
+          <p:nvPr/>
+        </p:nvSpPr>
+        <p:spPr>
+          <a:xfrm>
+            <a:off x="83127" y="0"/>
+            <a:ext cx="3087585" cy="523220"/>
+          </a:xfrm>
+          <a:prstGeom prst="rect">
+            <a:avLst/>
+          </a:prstGeom>
+          <a:noFill/>
+        </p:spPr>
+        <p:txBody>
+          <a:bodyPr wrap="square" rtlCol="0">
+            <a:spAutoFit/>
+          </a:bodyPr>
+          <a:lstStyle/>
+          <a:p>
+            <a:r>
+              <a:rPr lang="en-US" sz="2800" b="1" dirty="0" err="1"/>
+              <a:t>Inmon</a:t>
+            </a:r>
+            <a:r>
+              <a:rPr lang="en-US" sz="2800" b="1" dirty="0"/>
+              <a:t> vs Kimball </a:t>
+            </a:r>
+          </a:p>
+        </p:txBody>
+      </p:sp>
+    </p:spTree>
+    <p:extLst>
+      <p:ext uri="{BB962C8B-B14F-4D97-AF65-F5344CB8AC3E}">
+        <p14:creationId xmlns:p14="http://schemas.microsoft.com/office/powerpoint/2010/main" val="3750064097"/>
       </p:ext>
     </p:extLst>
   </p:cSld>

--- a/SQL_DW_OLAP_Cube.pptx
+++ b/SQL_DW_OLAP_Cube.pptx
@@ -9,8 +9,8 @@
   </p:notesMasterIdLst>
   <p:sldIdLst>
     <p:sldId id="334" r:id="rId2"/>
-    <p:sldId id="333" r:id="rId3"/>
-    <p:sldId id="338" r:id="rId4"/>
+    <p:sldId id="338" r:id="rId3"/>
+    <p:sldId id="333" r:id="rId4"/>
     <p:sldId id="335" r:id="rId5"/>
     <p:sldId id="337" r:id="rId6"/>
   </p:sldIdLst>
@@ -4045,6 +4045,493 @@
 </file>
 
 <file path=ppt/slides/slide2.xml><?xml version="1.0" encoding="utf-8"?>
+<p:sld xmlns:a="http://schemas.openxmlformats.org/drawingml/2006/main" xmlns:r="http://schemas.openxmlformats.org/officeDocument/2006/relationships" xmlns:p="http://schemas.openxmlformats.org/presentationml/2006/main">
+  <p:cSld>
+    <p:spTree>
+      <p:nvGrpSpPr>
+        <p:cNvPr id="1" name=""/>
+        <p:cNvGrpSpPr/>
+        <p:nvPr/>
+      </p:nvGrpSpPr>
+      <p:grpSpPr>
+        <a:xfrm>
+          <a:off x="0" y="0"/>
+          <a:ext cx="0" cy="0"/>
+          <a:chOff x="0" y="0"/>
+          <a:chExt cx="0" cy="0"/>
+        </a:xfrm>
+      </p:grpSpPr>
+      <p:pic>
+        <p:nvPicPr>
+          <p:cNvPr id="2" name="Picture 1">
+            <a:extLst>
+              <a:ext uri="{FF2B5EF4-FFF2-40B4-BE49-F238E27FC236}">
+                <a16:creationId xmlns:a16="http://schemas.microsoft.com/office/drawing/2014/main" id="{2634624D-E3AB-004F-AF17-C116607A7270}"/>
+              </a:ext>
+            </a:extLst>
+          </p:cNvPr>
+          <p:cNvPicPr>
+            <a:picLocks noChangeAspect="1"/>
+          </p:cNvPicPr>
+          <p:nvPr/>
+        </p:nvPicPr>
+        <p:blipFill>
+          <a:blip r:embed="rId2" cstate="email">
+            <a:extLst>
+              <a:ext uri="{28A0092B-C50C-407E-A947-70E740481C1C}">
+                <a14:useLocalDpi xmlns:a14="http://schemas.microsoft.com/office/drawing/2010/main"/>
+              </a:ext>
+            </a:extLst>
+          </a:blip>
+          <a:stretch>
+            <a:fillRect/>
+          </a:stretch>
+        </p:blipFill>
+        <p:spPr>
+          <a:xfrm>
+            <a:off x="7648724" y="3186073"/>
+            <a:ext cx="4513012" cy="2496995"/>
+          </a:xfrm>
+          <a:prstGeom prst="rect">
+            <a:avLst/>
+          </a:prstGeom>
+        </p:spPr>
+      </p:pic>
+      <p:sp>
+        <p:nvSpPr>
+          <p:cNvPr id="3" name="TextBox 2">
+            <a:extLst>
+              <a:ext uri="{FF2B5EF4-FFF2-40B4-BE49-F238E27FC236}">
+                <a16:creationId xmlns:a16="http://schemas.microsoft.com/office/drawing/2014/main" id="{61500258-BF7E-8547-93BD-66F6BFCA5B04}"/>
+              </a:ext>
+            </a:extLst>
+          </p:cNvPr>
+          <p:cNvSpPr txBox="1"/>
+          <p:nvPr/>
+        </p:nvSpPr>
+        <p:spPr>
+          <a:xfrm>
+            <a:off x="83128" y="0"/>
+            <a:ext cx="4963886" cy="523220"/>
+          </a:xfrm>
+          <a:prstGeom prst="rect">
+            <a:avLst/>
+          </a:prstGeom>
+          <a:noFill/>
+        </p:spPr>
+        <p:txBody>
+          <a:bodyPr wrap="square" rtlCol="0">
+            <a:spAutoFit/>
+          </a:bodyPr>
+          <a:lstStyle/>
+          <a:p>
+            <a:r>
+              <a:rPr lang="en-US" sz="2800" b="1" dirty="0"/>
+              <a:t>The Times of </a:t>
+            </a:r>
+            <a:r>
+              <a:rPr lang="en-US" sz="2800" b="1" dirty="0" err="1"/>
+              <a:t>Inmon</a:t>
+            </a:r>
+            <a:r>
+              <a:rPr lang="en-US" sz="2800" b="1" dirty="0"/>
+              <a:t> &amp; Kimball</a:t>
+            </a:r>
+          </a:p>
+        </p:txBody>
+      </p:sp>
+      <p:sp>
+        <p:nvSpPr>
+          <p:cNvPr id="4" name="TextBox 3">
+            <a:extLst>
+              <a:ext uri="{FF2B5EF4-FFF2-40B4-BE49-F238E27FC236}">
+                <a16:creationId xmlns:a16="http://schemas.microsoft.com/office/drawing/2014/main" id="{768920D5-BC91-D94F-AA9D-A126158BCD72}"/>
+              </a:ext>
+            </a:extLst>
+          </p:cNvPr>
+          <p:cNvSpPr txBox="1"/>
+          <p:nvPr/>
+        </p:nvSpPr>
+        <p:spPr>
+          <a:xfrm>
+            <a:off x="83127" y="606348"/>
+            <a:ext cx="4868883" cy="5878532"/>
+          </a:xfrm>
+          <a:prstGeom prst="rect">
+            <a:avLst/>
+          </a:prstGeom>
+          <a:noFill/>
+        </p:spPr>
+        <p:txBody>
+          <a:bodyPr wrap="square" rtlCol="0">
+            <a:spAutoFit/>
+          </a:bodyPr>
+          <a:lstStyle/>
+          <a:p>
+            <a:r>
+              <a:rPr lang="en-US" sz="1400" dirty="0"/>
+              <a:t>Imagine computers of 1970s.</a:t>
+            </a:r>
+          </a:p>
+          <a:p>
+            <a:pPr marL="285750" indent="-285750">
+              <a:buFont typeface="Arial" panose="020B0604020202020204" pitchFamily="34" charset="0"/>
+              <a:buChar char="•"/>
+            </a:pPr>
+            <a:r>
+              <a:rPr lang="en-US" sz="1400" dirty="0"/>
+              <a:t>A computer occupy the whole floor of a building</a:t>
+            </a:r>
+          </a:p>
+          <a:p>
+            <a:pPr marL="285750" indent="-285750">
+              <a:buFont typeface="Arial" panose="020B0604020202020204" pitchFamily="34" charset="0"/>
+              <a:buChar char="•"/>
+            </a:pPr>
+            <a:r>
+              <a:rPr lang="en-US" sz="1400" dirty="0"/>
+              <a:t>Computer have memory measured in 10s of Kilobytes</a:t>
+            </a:r>
+          </a:p>
+          <a:p>
+            <a:pPr marL="285750" indent="-285750">
+              <a:buFont typeface="Arial" panose="020B0604020202020204" pitchFamily="34" charset="0"/>
+              <a:buChar char="•"/>
+            </a:pPr>
+            <a:r>
+              <a:rPr lang="en-US" sz="1400" dirty="0"/>
+              <a:t>Punch cards slowly transition to magnetic tapes</a:t>
+            </a:r>
+          </a:p>
+          <a:p>
+            <a:pPr marL="285750" indent="-285750">
+              <a:buFont typeface="Arial" panose="020B0604020202020204" pitchFamily="34" charset="0"/>
+              <a:buChar char="•"/>
+            </a:pPr>
+            <a:r>
+              <a:rPr lang="en-US" sz="1400" dirty="0"/>
+              <a:t>IBM introduced VSAM files, relations, SQL</a:t>
+            </a:r>
+          </a:p>
+          <a:p>
+            <a:pPr marL="285750" indent="-285750">
+              <a:buFont typeface="Arial" panose="020B0604020202020204" pitchFamily="34" charset="0"/>
+              <a:buChar char="•"/>
+            </a:pPr>
+            <a:r>
+              <a:rPr lang="en-US" sz="1400" dirty="0"/>
+              <a:t>Usually just one computer in whole organization (IBM Mainframe or similar)</a:t>
+            </a:r>
+          </a:p>
+          <a:p>
+            <a:pPr marL="285750" indent="-285750">
+              <a:buFont typeface="Arial" panose="020B0604020202020204" pitchFamily="34" charset="0"/>
+              <a:buChar char="•"/>
+            </a:pPr>
+            <a:r>
+              <a:rPr lang="en-US" sz="1400" dirty="0"/>
+              <a:t>"Dumb terminals" connecting to the central computer. </a:t>
+            </a:r>
+            <a:br>
+              <a:rPr lang="en-US" sz="1400" dirty="0"/>
+            </a:br>
+            <a:r>
+              <a:rPr lang="en-US" sz="1400" dirty="0"/>
+              <a:t>There are no personal computers</a:t>
+            </a:r>
+          </a:p>
+          <a:p>
+            <a:pPr marL="285750" indent="-285750">
+              <a:buFont typeface="Arial" panose="020B0604020202020204" pitchFamily="34" charset="0"/>
+              <a:buChar char="•"/>
+            </a:pPr>
+            <a:r>
+              <a:rPr lang="en-US" sz="1400" dirty="0"/>
+              <a:t>All company's information is typically stored in one central computer</a:t>
+            </a:r>
+          </a:p>
+          <a:p>
+            <a:endParaRPr lang="en-US" sz="1400" dirty="0"/>
+          </a:p>
+          <a:p>
+            <a:r>
+              <a:rPr lang="en-US" sz="1400" dirty="0"/>
+              <a:t>These are times when </a:t>
+            </a:r>
+            <a:r>
+              <a:rPr lang="en-US" sz="1400" b="1" dirty="0" err="1">
+                <a:solidFill>
+                  <a:srgbClr val="FF0000"/>
+                </a:solidFill>
+              </a:rPr>
+              <a:t>Inmon</a:t>
+            </a:r>
+            <a:r>
+              <a:rPr lang="en-US" sz="1400" b="1" dirty="0">
+                <a:solidFill>
+                  <a:srgbClr val="FF0000"/>
+                </a:solidFill>
+              </a:rPr>
+              <a:t> &amp; Kimball</a:t>
+            </a:r>
+            <a:r>
+              <a:rPr lang="en-US" sz="1400" dirty="0"/>
+              <a:t> were crafting their approaches.</a:t>
+            </a:r>
+          </a:p>
+          <a:p>
+            <a:endParaRPr lang="en-US" sz="1400" dirty="0"/>
+          </a:p>
+          <a:p>
+            <a:r>
+              <a:rPr lang="en-US" sz="1400" dirty="0"/>
+              <a:t>As computers have become cheaper and more powerful, organization were able to buy several computers – one per department. Then people had to decide how to structure flows of information.</a:t>
+            </a:r>
+          </a:p>
+          <a:p>
+            <a:endParaRPr lang="en-US" sz="1400" dirty="0"/>
+          </a:p>
+          <a:p>
+            <a:pPr marL="285750" indent="-285750">
+              <a:buFont typeface="Arial" panose="020B0604020202020204" pitchFamily="34" charset="0"/>
+              <a:buChar char="•"/>
+            </a:pPr>
+            <a:r>
+              <a:rPr lang="en-US" sz="1400" b="1" dirty="0" err="1">
+                <a:solidFill>
+                  <a:srgbClr val="FF0000"/>
+                </a:solidFill>
+              </a:rPr>
+              <a:t>Inmon</a:t>
+            </a:r>
+            <a:r>
+              <a:rPr lang="en-US" sz="1400" dirty="0"/>
+              <a:t>: from central main computer down to departments</a:t>
+            </a:r>
+          </a:p>
+          <a:p>
+            <a:pPr marL="285750" indent="-285750">
+              <a:buFont typeface="Arial" panose="020B0604020202020204" pitchFamily="34" charset="0"/>
+              <a:buChar char="•"/>
+            </a:pPr>
+            <a:r>
+              <a:rPr lang="en-US" sz="1400" b="1" dirty="0">
+                <a:solidFill>
+                  <a:srgbClr val="FF0000"/>
+                </a:solidFill>
+              </a:rPr>
+              <a:t>Kimball</a:t>
+            </a:r>
+            <a:r>
+              <a:rPr lang="en-US" sz="1400" dirty="0"/>
+              <a:t>: from departments to central</a:t>
+            </a:r>
+          </a:p>
+          <a:p>
+            <a:pPr marL="285750" indent="-285750">
+              <a:buFont typeface="Arial" panose="020B0604020202020204" pitchFamily="34" charset="0"/>
+              <a:buChar char="•"/>
+            </a:pPr>
+            <a:endParaRPr lang="en-US" sz="1400" dirty="0"/>
+          </a:p>
+          <a:p>
+            <a:r>
+              <a:rPr lang="en-US" sz="1400" dirty="0">
+                <a:solidFill>
+                  <a:srgbClr val="00B050"/>
+                </a:solidFill>
+              </a:rPr>
+              <a:t>Now 30-40 years later any smart phone is more powerful than "huge" DW systems of </a:t>
+            </a:r>
+            <a:r>
+              <a:rPr lang="en-US" sz="1400" dirty="0" err="1">
+                <a:solidFill>
+                  <a:srgbClr val="00B050"/>
+                </a:solidFill>
+              </a:rPr>
+              <a:t>Inmon</a:t>
+            </a:r>
+            <a:r>
+              <a:rPr lang="en-US" sz="1400" dirty="0">
+                <a:solidFill>
+                  <a:srgbClr val="00B050"/>
+                </a:solidFill>
+              </a:rPr>
+              <a:t> &amp; Kimball's era.</a:t>
+            </a:r>
+          </a:p>
+          <a:p>
+            <a:endParaRPr lang="en-US" sz="1400" dirty="0"/>
+          </a:p>
+          <a:p>
+            <a:r>
+              <a:rPr lang="en-US" sz="1200" dirty="0">
+                <a:hlinkClick r:id="rId3"/>
+              </a:rPr>
+              <a:t>https://www.dataversity.net/a-short-history-of-data-warehousing/</a:t>
+            </a:r>
+            <a:r>
+              <a:rPr lang="en-US" sz="1200" dirty="0"/>
+              <a:t> </a:t>
+            </a:r>
+          </a:p>
+        </p:txBody>
+      </p:sp>
+      <p:pic>
+        <p:nvPicPr>
+          <p:cNvPr id="1028" name="Picture 4" descr="Description about Terminals input device of computer">
+            <a:extLst>
+              <a:ext uri="{FF2B5EF4-FFF2-40B4-BE49-F238E27FC236}">
+                <a16:creationId xmlns:a16="http://schemas.microsoft.com/office/drawing/2014/main" id="{ED1D4892-91DE-334B-B70D-37355C5D74BB}"/>
+              </a:ext>
+            </a:extLst>
+          </p:cNvPr>
+          <p:cNvPicPr>
+            <a:picLocks noChangeAspect="1" noChangeArrowheads="1"/>
+          </p:cNvPicPr>
+          <p:nvPr/>
+        </p:nvPicPr>
+        <p:blipFill>
+          <a:blip r:embed="rId4">
+            <a:extLst>
+              <a:ext uri="{28A0092B-C50C-407E-A947-70E740481C1C}">
+                <a14:useLocalDpi xmlns:a14="http://schemas.microsoft.com/office/drawing/2010/main"/>
+              </a:ext>
+            </a:extLst>
+          </a:blip>
+          <a:srcRect/>
+          <a:stretch>
+            <a:fillRect/>
+          </a:stretch>
+        </p:blipFill>
+        <p:spPr bwMode="auto">
+          <a:xfrm>
+            <a:off x="4952010" y="2939266"/>
+            <a:ext cx="2696714" cy="1771848"/>
+          </a:xfrm>
+          <a:prstGeom prst="rect">
+            <a:avLst/>
+          </a:prstGeom>
+          <a:noFill/>
+          <a:extLst>
+            <a:ext uri="{909E8E84-426E-40DD-AFC4-6F175D3DCCD1}">
+              <a14:hiddenFill xmlns:a14="http://schemas.microsoft.com/office/drawing/2010/main">
+                <a:solidFill>
+                  <a:srgbClr val="FFFFFF"/>
+                </a:solidFill>
+              </a14:hiddenFill>
+            </a:ext>
+          </a:extLst>
+        </p:spPr>
+      </p:pic>
+      <p:pic>
+        <p:nvPicPr>
+          <p:cNvPr id="1030" name="Picture 6" descr="Computer terminal - Wikipedia">
+            <a:extLst>
+              <a:ext uri="{FF2B5EF4-FFF2-40B4-BE49-F238E27FC236}">
+                <a16:creationId xmlns:a16="http://schemas.microsoft.com/office/drawing/2014/main" id="{98EEC336-1B48-1B4E-A5A6-A15B26FEB08A}"/>
+              </a:ext>
+            </a:extLst>
+          </p:cNvPr>
+          <p:cNvPicPr>
+            <a:picLocks noChangeAspect="1" noChangeArrowheads="1"/>
+          </p:cNvPicPr>
+          <p:nvPr/>
+        </p:nvPicPr>
+        <p:blipFill>
+          <a:blip r:embed="rId5" cstate="email">
+            <a:extLst>
+              <a:ext uri="{28A0092B-C50C-407E-A947-70E740481C1C}">
+                <a14:useLocalDpi xmlns:a14="http://schemas.microsoft.com/office/drawing/2010/main"/>
+              </a:ext>
+            </a:extLst>
+          </a:blip>
+          <a:srcRect/>
+          <a:stretch>
+            <a:fillRect/>
+          </a:stretch>
+        </p:blipFill>
+        <p:spPr bwMode="auto">
+          <a:xfrm>
+            <a:off x="9624386" y="314179"/>
+            <a:ext cx="2522457" cy="2238499"/>
+          </a:xfrm>
+          <a:prstGeom prst="rect">
+            <a:avLst/>
+          </a:prstGeom>
+          <a:noFill/>
+          <a:extLst>
+            <a:ext uri="{909E8E84-426E-40DD-AFC4-6F175D3DCCD1}">
+              <a14:hiddenFill xmlns:a14="http://schemas.microsoft.com/office/drawing/2010/main">
+                <a:solidFill>
+                  <a:srgbClr val="FFFFFF"/>
+                </a:solidFill>
+              </a14:hiddenFill>
+            </a:ext>
+          </a:extLst>
+        </p:spPr>
+      </p:pic>
+      <p:pic>
+        <p:nvPicPr>
+          <p:cNvPr id="1032" name="Picture 8" descr="How big is a mainframe? - Retrocomputing Stack Exchange">
+            <a:extLst>
+              <a:ext uri="{FF2B5EF4-FFF2-40B4-BE49-F238E27FC236}">
+                <a16:creationId xmlns:a16="http://schemas.microsoft.com/office/drawing/2014/main" id="{47352DB4-5ED2-304D-996D-C73A2897E535}"/>
+              </a:ext>
+            </a:extLst>
+          </p:cNvPr>
+          <p:cNvPicPr>
+            <a:picLocks noChangeAspect="1" noChangeArrowheads="1"/>
+          </p:cNvPicPr>
+          <p:nvPr/>
+        </p:nvPicPr>
+        <p:blipFill>
+          <a:blip r:embed="rId6" cstate="email">
+            <a:extLst>
+              <a:ext uri="{28A0092B-C50C-407E-A947-70E740481C1C}">
+                <a14:useLocalDpi xmlns:a14="http://schemas.microsoft.com/office/drawing/2010/main"/>
+              </a:ext>
+            </a:extLst>
+          </a:blip>
+          <a:srcRect/>
+          <a:stretch>
+            <a:fillRect/>
+          </a:stretch>
+        </p:blipFill>
+        <p:spPr bwMode="auto">
+          <a:xfrm>
+            <a:off x="5081238" y="134089"/>
+            <a:ext cx="4127500" cy="2470150"/>
+          </a:xfrm>
+          <a:prstGeom prst="rect">
+            <a:avLst/>
+          </a:prstGeom>
+          <a:noFill/>
+          <a:extLst>
+            <a:ext uri="{909E8E84-426E-40DD-AFC4-6F175D3DCCD1}">
+              <a14:hiddenFill xmlns:a14="http://schemas.microsoft.com/office/drawing/2010/main">
+                <a:solidFill>
+                  <a:srgbClr val="FFFFFF"/>
+                </a:solidFill>
+              </a14:hiddenFill>
+            </a:ext>
+          </a:extLst>
+        </p:spPr>
+      </p:pic>
+    </p:spTree>
+    <p:extLst>
+      <p:ext uri="{BB962C8B-B14F-4D97-AF65-F5344CB8AC3E}">
+        <p14:creationId xmlns:p14="http://schemas.microsoft.com/office/powerpoint/2010/main" val="4053138789"/>
+      </p:ext>
+    </p:extLst>
+  </p:cSld>
+  <p:clrMapOvr>
+    <a:masterClrMapping/>
+  </p:clrMapOvr>
+</p:sld>
+</file>
+
+<file path=ppt/slides/slide3.xml><?xml version="1.0" encoding="utf-8"?>
 <p:sld xmlns:a="http://schemas.openxmlformats.org/drawingml/2006/main" xmlns:r="http://schemas.openxmlformats.org/officeDocument/2006/relationships" xmlns:p="http://schemas.openxmlformats.org/presentationml/2006/main">
   <p:cSld>
     <p:spTree>
@@ -5157,493 +5644,6 @@
 </p:sld>
 </file>
 
-<file path=ppt/slides/slide3.xml><?xml version="1.0" encoding="utf-8"?>
-<p:sld xmlns:a="http://schemas.openxmlformats.org/drawingml/2006/main" xmlns:r="http://schemas.openxmlformats.org/officeDocument/2006/relationships" xmlns:p="http://schemas.openxmlformats.org/presentationml/2006/main">
-  <p:cSld>
-    <p:spTree>
-      <p:nvGrpSpPr>
-        <p:cNvPr id="1" name=""/>
-        <p:cNvGrpSpPr/>
-        <p:nvPr/>
-      </p:nvGrpSpPr>
-      <p:grpSpPr>
-        <a:xfrm>
-          <a:off x="0" y="0"/>
-          <a:ext cx="0" cy="0"/>
-          <a:chOff x="0" y="0"/>
-          <a:chExt cx="0" cy="0"/>
-        </a:xfrm>
-      </p:grpSpPr>
-      <p:pic>
-        <p:nvPicPr>
-          <p:cNvPr id="2" name="Picture 1">
-            <a:extLst>
-              <a:ext uri="{FF2B5EF4-FFF2-40B4-BE49-F238E27FC236}">
-                <a16:creationId xmlns:a16="http://schemas.microsoft.com/office/drawing/2014/main" id="{2634624D-E3AB-004F-AF17-C116607A7270}"/>
-              </a:ext>
-            </a:extLst>
-          </p:cNvPr>
-          <p:cNvPicPr>
-            <a:picLocks noChangeAspect="1"/>
-          </p:cNvPicPr>
-          <p:nvPr/>
-        </p:nvPicPr>
-        <p:blipFill>
-          <a:blip r:embed="rId2" cstate="email">
-            <a:extLst>
-              <a:ext uri="{28A0092B-C50C-407E-A947-70E740481C1C}">
-                <a14:useLocalDpi xmlns:a14="http://schemas.microsoft.com/office/drawing/2010/main"/>
-              </a:ext>
-            </a:extLst>
-          </a:blip>
-          <a:stretch>
-            <a:fillRect/>
-          </a:stretch>
-        </p:blipFill>
-        <p:spPr>
-          <a:xfrm>
-            <a:off x="7648724" y="3186073"/>
-            <a:ext cx="4513012" cy="2496995"/>
-          </a:xfrm>
-          <a:prstGeom prst="rect">
-            <a:avLst/>
-          </a:prstGeom>
-        </p:spPr>
-      </p:pic>
-      <p:sp>
-        <p:nvSpPr>
-          <p:cNvPr id="3" name="TextBox 2">
-            <a:extLst>
-              <a:ext uri="{FF2B5EF4-FFF2-40B4-BE49-F238E27FC236}">
-                <a16:creationId xmlns:a16="http://schemas.microsoft.com/office/drawing/2014/main" id="{61500258-BF7E-8547-93BD-66F6BFCA5B04}"/>
-              </a:ext>
-            </a:extLst>
-          </p:cNvPr>
-          <p:cNvSpPr txBox="1"/>
-          <p:nvPr/>
-        </p:nvSpPr>
-        <p:spPr>
-          <a:xfrm>
-            <a:off x="83128" y="0"/>
-            <a:ext cx="4963886" cy="523220"/>
-          </a:xfrm>
-          <a:prstGeom prst="rect">
-            <a:avLst/>
-          </a:prstGeom>
-          <a:noFill/>
-        </p:spPr>
-        <p:txBody>
-          <a:bodyPr wrap="square" rtlCol="0">
-            <a:spAutoFit/>
-          </a:bodyPr>
-          <a:lstStyle/>
-          <a:p>
-            <a:r>
-              <a:rPr lang="en-US" sz="2800" b="1" dirty="0"/>
-              <a:t>The Times of </a:t>
-            </a:r>
-            <a:r>
-              <a:rPr lang="en-US" sz="2800" b="1" dirty="0" err="1"/>
-              <a:t>Inmon</a:t>
-            </a:r>
-            <a:r>
-              <a:rPr lang="en-US" sz="2800" b="1" dirty="0"/>
-              <a:t> &amp; Kimball</a:t>
-            </a:r>
-          </a:p>
-        </p:txBody>
-      </p:sp>
-      <p:sp>
-        <p:nvSpPr>
-          <p:cNvPr id="4" name="TextBox 3">
-            <a:extLst>
-              <a:ext uri="{FF2B5EF4-FFF2-40B4-BE49-F238E27FC236}">
-                <a16:creationId xmlns:a16="http://schemas.microsoft.com/office/drawing/2014/main" id="{768920D5-BC91-D94F-AA9D-A126158BCD72}"/>
-              </a:ext>
-            </a:extLst>
-          </p:cNvPr>
-          <p:cNvSpPr txBox="1"/>
-          <p:nvPr/>
-        </p:nvSpPr>
-        <p:spPr>
-          <a:xfrm>
-            <a:off x="83127" y="606348"/>
-            <a:ext cx="4868883" cy="5878532"/>
-          </a:xfrm>
-          <a:prstGeom prst="rect">
-            <a:avLst/>
-          </a:prstGeom>
-          <a:noFill/>
-        </p:spPr>
-        <p:txBody>
-          <a:bodyPr wrap="square" rtlCol="0">
-            <a:spAutoFit/>
-          </a:bodyPr>
-          <a:lstStyle/>
-          <a:p>
-            <a:r>
-              <a:rPr lang="en-US" sz="1400" dirty="0"/>
-              <a:t>Imagine computers of 1970s.</a:t>
-            </a:r>
-          </a:p>
-          <a:p>
-            <a:pPr marL="285750" indent="-285750">
-              <a:buFont typeface="Arial" panose="020B0604020202020204" pitchFamily="34" charset="0"/>
-              <a:buChar char="•"/>
-            </a:pPr>
-            <a:r>
-              <a:rPr lang="en-US" sz="1400" dirty="0"/>
-              <a:t>A computer occupy the whole floor of a building</a:t>
-            </a:r>
-          </a:p>
-          <a:p>
-            <a:pPr marL="285750" indent="-285750">
-              <a:buFont typeface="Arial" panose="020B0604020202020204" pitchFamily="34" charset="0"/>
-              <a:buChar char="•"/>
-            </a:pPr>
-            <a:r>
-              <a:rPr lang="en-US" sz="1400" dirty="0"/>
-              <a:t>Computer have memory measured in 10s of Kilobytes</a:t>
-            </a:r>
-          </a:p>
-          <a:p>
-            <a:pPr marL="285750" indent="-285750">
-              <a:buFont typeface="Arial" panose="020B0604020202020204" pitchFamily="34" charset="0"/>
-              <a:buChar char="•"/>
-            </a:pPr>
-            <a:r>
-              <a:rPr lang="en-US" sz="1400" dirty="0"/>
-              <a:t>Punch cards slowly transition to magnetic tapes</a:t>
-            </a:r>
-          </a:p>
-          <a:p>
-            <a:pPr marL="285750" indent="-285750">
-              <a:buFont typeface="Arial" panose="020B0604020202020204" pitchFamily="34" charset="0"/>
-              <a:buChar char="•"/>
-            </a:pPr>
-            <a:r>
-              <a:rPr lang="en-US" sz="1400" dirty="0"/>
-              <a:t>IBM introduced VSAM files, relations, SQL</a:t>
-            </a:r>
-          </a:p>
-          <a:p>
-            <a:pPr marL="285750" indent="-285750">
-              <a:buFont typeface="Arial" panose="020B0604020202020204" pitchFamily="34" charset="0"/>
-              <a:buChar char="•"/>
-            </a:pPr>
-            <a:r>
-              <a:rPr lang="en-US" sz="1400" dirty="0"/>
-              <a:t>Usually just one computer in whole organization (IBM Mainframe or similar)</a:t>
-            </a:r>
-          </a:p>
-          <a:p>
-            <a:pPr marL="285750" indent="-285750">
-              <a:buFont typeface="Arial" panose="020B0604020202020204" pitchFamily="34" charset="0"/>
-              <a:buChar char="•"/>
-            </a:pPr>
-            <a:r>
-              <a:rPr lang="en-US" sz="1400" dirty="0"/>
-              <a:t>"Dumb terminals" connecting to the central computer. </a:t>
-            </a:r>
-            <a:br>
-              <a:rPr lang="en-US" sz="1400" dirty="0"/>
-            </a:br>
-            <a:r>
-              <a:rPr lang="en-US" sz="1400" dirty="0"/>
-              <a:t>There are no personal computers</a:t>
-            </a:r>
-          </a:p>
-          <a:p>
-            <a:pPr marL="285750" indent="-285750">
-              <a:buFont typeface="Arial" panose="020B0604020202020204" pitchFamily="34" charset="0"/>
-              <a:buChar char="•"/>
-            </a:pPr>
-            <a:r>
-              <a:rPr lang="en-US" sz="1400" dirty="0"/>
-              <a:t>All company's information is typically stored in one central computer</a:t>
-            </a:r>
-          </a:p>
-          <a:p>
-            <a:endParaRPr lang="en-US" sz="1400" dirty="0"/>
-          </a:p>
-          <a:p>
-            <a:r>
-              <a:rPr lang="en-US" sz="1400" dirty="0"/>
-              <a:t>These are times when </a:t>
-            </a:r>
-            <a:r>
-              <a:rPr lang="en-US" sz="1400" b="1" dirty="0" err="1">
-                <a:solidFill>
-                  <a:srgbClr val="FF0000"/>
-                </a:solidFill>
-              </a:rPr>
-              <a:t>Inmon</a:t>
-            </a:r>
-            <a:r>
-              <a:rPr lang="en-US" sz="1400" b="1" dirty="0">
-                <a:solidFill>
-                  <a:srgbClr val="FF0000"/>
-                </a:solidFill>
-              </a:rPr>
-              <a:t> &amp; Kimball</a:t>
-            </a:r>
-            <a:r>
-              <a:rPr lang="en-US" sz="1400" dirty="0"/>
-              <a:t> were crafting their approaches.</a:t>
-            </a:r>
-          </a:p>
-          <a:p>
-            <a:endParaRPr lang="en-US" sz="1400" dirty="0"/>
-          </a:p>
-          <a:p>
-            <a:r>
-              <a:rPr lang="en-US" sz="1400" dirty="0"/>
-              <a:t>As computers have become cheaper and more powerful, organization were able to buy several computers – one per department. Then people had to decide how to structure flows of information.</a:t>
-            </a:r>
-          </a:p>
-          <a:p>
-            <a:endParaRPr lang="en-US" sz="1400" dirty="0"/>
-          </a:p>
-          <a:p>
-            <a:pPr marL="285750" indent="-285750">
-              <a:buFont typeface="Arial" panose="020B0604020202020204" pitchFamily="34" charset="0"/>
-              <a:buChar char="•"/>
-            </a:pPr>
-            <a:r>
-              <a:rPr lang="en-US" sz="1400" b="1" dirty="0" err="1">
-                <a:solidFill>
-                  <a:srgbClr val="FF0000"/>
-                </a:solidFill>
-              </a:rPr>
-              <a:t>Inmon</a:t>
-            </a:r>
-            <a:r>
-              <a:rPr lang="en-US" sz="1400" dirty="0"/>
-              <a:t>: from central main computer down to departments</a:t>
-            </a:r>
-          </a:p>
-          <a:p>
-            <a:pPr marL="285750" indent="-285750">
-              <a:buFont typeface="Arial" panose="020B0604020202020204" pitchFamily="34" charset="0"/>
-              <a:buChar char="•"/>
-            </a:pPr>
-            <a:r>
-              <a:rPr lang="en-US" sz="1400" b="1" dirty="0">
-                <a:solidFill>
-                  <a:srgbClr val="FF0000"/>
-                </a:solidFill>
-              </a:rPr>
-              <a:t>Kimball</a:t>
-            </a:r>
-            <a:r>
-              <a:rPr lang="en-US" sz="1400" dirty="0"/>
-              <a:t>: from departments to central</a:t>
-            </a:r>
-          </a:p>
-          <a:p>
-            <a:pPr marL="285750" indent="-285750">
-              <a:buFont typeface="Arial" panose="020B0604020202020204" pitchFamily="34" charset="0"/>
-              <a:buChar char="•"/>
-            </a:pPr>
-            <a:endParaRPr lang="en-US" sz="1400" dirty="0"/>
-          </a:p>
-          <a:p>
-            <a:r>
-              <a:rPr lang="en-US" sz="1400" dirty="0">
-                <a:solidFill>
-                  <a:srgbClr val="00B050"/>
-                </a:solidFill>
-              </a:rPr>
-              <a:t>Now 30-40 years later any smart phone is more powerful than "huge" DW systems of </a:t>
-            </a:r>
-            <a:r>
-              <a:rPr lang="en-US" sz="1400" dirty="0" err="1">
-                <a:solidFill>
-                  <a:srgbClr val="00B050"/>
-                </a:solidFill>
-              </a:rPr>
-              <a:t>Inmon</a:t>
-            </a:r>
-            <a:r>
-              <a:rPr lang="en-US" sz="1400" dirty="0">
-                <a:solidFill>
-                  <a:srgbClr val="00B050"/>
-                </a:solidFill>
-              </a:rPr>
-              <a:t> &amp; Kimball's era.</a:t>
-            </a:r>
-          </a:p>
-          <a:p>
-            <a:endParaRPr lang="en-US" sz="1400" dirty="0"/>
-          </a:p>
-          <a:p>
-            <a:r>
-              <a:rPr lang="en-US" sz="1200" dirty="0">
-                <a:hlinkClick r:id="rId3"/>
-              </a:rPr>
-              <a:t>https://www.dataversity.net/a-short-history-of-data-warehousing/</a:t>
-            </a:r>
-            <a:r>
-              <a:rPr lang="en-US" sz="1200" dirty="0"/>
-              <a:t> </a:t>
-            </a:r>
-          </a:p>
-        </p:txBody>
-      </p:sp>
-      <p:pic>
-        <p:nvPicPr>
-          <p:cNvPr id="1028" name="Picture 4" descr="Description about Terminals input device of computer">
-            <a:extLst>
-              <a:ext uri="{FF2B5EF4-FFF2-40B4-BE49-F238E27FC236}">
-                <a16:creationId xmlns:a16="http://schemas.microsoft.com/office/drawing/2014/main" id="{ED1D4892-91DE-334B-B70D-37355C5D74BB}"/>
-              </a:ext>
-            </a:extLst>
-          </p:cNvPr>
-          <p:cNvPicPr>
-            <a:picLocks noChangeAspect="1" noChangeArrowheads="1"/>
-          </p:cNvPicPr>
-          <p:nvPr/>
-        </p:nvPicPr>
-        <p:blipFill>
-          <a:blip r:embed="rId4">
-            <a:extLst>
-              <a:ext uri="{28A0092B-C50C-407E-A947-70E740481C1C}">
-                <a14:useLocalDpi xmlns:a14="http://schemas.microsoft.com/office/drawing/2010/main"/>
-              </a:ext>
-            </a:extLst>
-          </a:blip>
-          <a:srcRect/>
-          <a:stretch>
-            <a:fillRect/>
-          </a:stretch>
-        </p:blipFill>
-        <p:spPr bwMode="auto">
-          <a:xfrm>
-            <a:off x="4952010" y="2939266"/>
-            <a:ext cx="2696714" cy="1771848"/>
-          </a:xfrm>
-          <a:prstGeom prst="rect">
-            <a:avLst/>
-          </a:prstGeom>
-          <a:noFill/>
-          <a:extLst>
-            <a:ext uri="{909E8E84-426E-40DD-AFC4-6F175D3DCCD1}">
-              <a14:hiddenFill xmlns:a14="http://schemas.microsoft.com/office/drawing/2010/main">
-                <a:solidFill>
-                  <a:srgbClr val="FFFFFF"/>
-                </a:solidFill>
-              </a14:hiddenFill>
-            </a:ext>
-          </a:extLst>
-        </p:spPr>
-      </p:pic>
-      <p:pic>
-        <p:nvPicPr>
-          <p:cNvPr id="1030" name="Picture 6" descr="Computer terminal - Wikipedia">
-            <a:extLst>
-              <a:ext uri="{FF2B5EF4-FFF2-40B4-BE49-F238E27FC236}">
-                <a16:creationId xmlns:a16="http://schemas.microsoft.com/office/drawing/2014/main" id="{98EEC336-1B48-1B4E-A5A6-A15B26FEB08A}"/>
-              </a:ext>
-            </a:extLst>
-          </p:cNvPr>
-          <p:cNvPicPr>
-            <a:picLocks noChangeAspect="1" noChangeArrowheads="1"/>
-          </p:cNvPicPr>
-          <p:nvPr/>
-        </p:nvPicPr>
-        <p:blipFill>
-          <a:blip r:embed="rId5" cstate="email">
-            <a:extLst>
-              <a:ext uri="{28A0092B-C50C-407E-A947-70E740481C1C}">
-                <a14:useLocalDpi xmlns:a14="http://schemas.microsoft.com/office/drawing/2010/main"/>
-              </a:ext>
-            </a:extLst>
-          </a:blip>
-          <a:srcRect/>
-          <a:stretch>
-            <a:fillRect/>
-          </a:stretch>
-        </p:blipFill>
-        <p:spPr bwMode="auto">
-          <a:xfrm>
-            <a:off x="9624386" y="314179"/>
-            <a:ext cx="2522457" cy="2238499"/>
-          </a:xfrm>
-          <a:prstGeom prst="rect">
-            <a:avLst/>
-          </a:prstGeom>
-          <a:noFill/>
-          <a:extLst>
-            <a:ext uri="{909E8E84-426E-40DD-AFC4-6F175D3DCCD1}">
-              <a14:hiddenFill xmlns:a14="http://schemas.microsoft.com/office/drawing/2010/main">
-                <a:solidFill>
-                  <a:srgbClr val="FFFFFF"/>
-                </a:solidFill>
-              </a14:hiddenFill>
-            </a:ext>
-          </a:extLst>
-        </p:spPr>
-      </p:pic>
-      <p:pic>
-        <p:nvPicPr>
-          <p:cNvPr id="1032" name="Picture 8" descr="How big is a mainframe? - Retrocomputing Stack Exchange">
-            <a:extLst>
-              <a:ext uri="{FF2B5EF4-FFF2-40B4-BE49-F238E27FC236}">
-                <a16:creationId xmlns:a16="http://schemas.microsoft.com/office/drawing/2014/main" id="{47352DB4-5ED2-304D-996D-C73A2897E535}"/>
-              </a:ext>
-            </a:extLst>
-          </p:cNvPr>
-          <p:cNvPicPr>
-            <a:picLocks noChangeAspect="1" noChangeArrowheads="1"/>
-          </p:cNvPicPr>
-          <p:nvPr/>
-        </p:nvPicPr>
-        <p:blipFill>
-          <a:blip r:embed="rId6" cstate="email">
-            <a:extLst>
-              <a:ext uri="{28A0092B-C50C-407E-A947-70E740481C1C}">
-                <a14:useLocalDpi xmlns:a14="http://schemas.microsoft.com/office/drawing/2010/main"/>
-              </a:ext>
-            </a:extLst>
-          </a:blip>
-          <a:srcRect/>
-          <a:stretch>
-            <a:fillRect/>
-          </a:stretch>
-        </p:blipFill>
-        <p:spPr bwMode="auto">
-          <a:xfrm>
-            <a:off x="5081238" y="134089"/>
-            <a:ext cx="4127500" cy="2470150"/>
-          </a:xfrm>
-          <a:prstGeom prst="rect">
-            <a:avLst/>
-          </a:prstGeom>
-          <a:noFill/>
-          <a:extLst>
-            <a:ext uri="{909E8E84-426E-40DD-AFC4-6F175D3DCCD1}">
-              <a14:hiddenFill xmlns:a14="http://schemas.microsoft.com/office/drawing/2010/main">
-                <a:solidFill>
-                  <a:srgbClr val="FFFFFF"/>
-                </a:solidFill>
-              </a14:hiddenFill>
-            </a:ext>
-          </a:extLst>
-        </p:spPr>
-      </p:pic>
-    </p:spTree>
-    <p:extLst>
-      <p:ext uri="{BB962C8B-B14F-4D97-AF65-F5344CB8AC3E}">
-        <p14:creationId xmlns:p14="http://schemas.microsoft.com/office/powerpoint/2010/main" val="4053138789"/>
-      </p:ext>
-    </p:extLst>
-  </p:cSld>
-  <p:clrMapOvr>
-    <a:masterClrMapping/>
-  </p:clrMapOvr>
-</p:sld>
-</file>
-
 <file path=ppt/slides/slide4.xml><?xml version="1.0" encoding="utf-8"?>
 <p:sld xmlns:a="http://schemas.openxmlformats.org/drawingml/2006/main" xmlns:r="http://schemas.openxmlformats.org/officeDocument/2006/relationships" xmlns:p="http://schemas.openxmlformats.org/presentationml/2006/main">
   <p:cSld>
